--- a/docs/pptx/auc3/ritu-auc3-linsubhr-ratio-anyhosp.pptx
+++ b/docs/pptx/auc3/ritu-auc3-linsubhr-ratio-anyhosp.pptx
@@ -2443,7 +2443,7 @@
           </p:nvSpPr>
           <p:spPr>
             <a:xfrm>
-              <a:off x="1463479" y="2073503"/>
+              <a:off x="1464298" y="2073503"/>
               <a:ext cx="0" cy="3649639"/>
             </a:xfrm>
             <a:custGeom>
@@ -2486,7 +2486,7 @@
           </p:nvSpPr>
           <p:spPr>
             <a:xfrm>
-              <a:off x="3267849" y="2073503"/>
+              <a:off x="3268188" y="2073503"/>
               <a:ext cx="0" cy="3649639"/>
             </a:xfrm>
             <a:custGeom>
@@ -2529,7 +2529,7 @@
           </p:nvSpPr>
           <p:spPr>
             <a:xfrm>
-              <a:off x="5072218" y="2073503"/>
+              <a:off x="5072078" y="2073503"/>
               <a:ext cx="0" cy="3649639"/>
             </a:xfrm>
             <a:custGeom>
@@ -2572,7 +2572,7 @@
           </p:nvSpPr>
           <p:spPr>
             <a:xfrm>
-              <a:off x="6876587" y="2073503"/>
+              <a:off x="6875967" y="2073503"/>
               <a:ext cx="0" cy="3649639"/>
             </a:xfrm>
             <a:custGeom>
@@ -2830,7 +2830,7 @@
           </p:nvSpPr>
           <p:spPr>
             <a:xfrm>
-              <a:off x="2365664" y="2073503"/>
+              <a:off x="2366243" y="2073503"/>
               <a:ext cx="0" cy="3649639"/>
             </a:xfrm>
             <a:custGeom>
@@ -2873,7 +2873,7 @@
           </p:nvSpPr>
           <p:spPr>
             <a:xfrm>
-              <a:off x="4170033" y="2073503"/>
+              <a:off x="4170133" y="2073503"/>
               <a:ext cx="0" cy="3649639"/>
             </a:xfrm>
             <a:custGeom>
@@ -2916,7 +2916,7 @@
           </p:nvSpPr>
           <p:spPr>
             <a:xfrm>
-              <a:off x="5974402" y="2073503"/>
+              <a:off x="5974022" y="2073503"/>
               <a:ext cx="0" cy="3649639"/>
             </a:xfrm>
             <a:custGeom>
@@ -2959,7 +2959,7 @@
           </p:nvSpPr>
           <p:spPr>
             <a:xfrm>
-              <a:off x="7778772" y="2073503"/>
+              <a:off x="7777912" y="2073503"/>
               <a:ext cx="0" cy="3649639"/>
             </a:xfrm>
             <a:custGeom>
@@ -3003,536 +3003,533 @@
           <p:spPr>
             <a:xfrm>
               <a:off x="1172049" y="2073503"/>
-              <a:ext cx="7090630" cy="3420293"/>
+              <a:ext cx="7090630" cy="3422967"/>
             </a:xfrm>
             <a:custGeom>
               <a:avLst/>
               <a:pathLst>
-                <a:path w="7090630" h="3420293">
+                <a:path w="7090630" h="3422967">
                   <a:moveTo>
-                    <a:pt x="705286" y="0"/>
+                    <a:pt x="751340" y="0"/>
                   </a:moveTo>
                   <a:lnTo>
-                    <a:pt x="716225" y="24279"/>
-                  </a:lnTo>
-                  <a:lnTo>
-                    <a:pt x="787847" y="176265"/>
-                  </a:lnTo>
-                  <a:lnTo>
-                    <a:pt x="859470" y="321573"/>
-                  </a:lnTo>
-                  <a:lnTo>
-                    <a:pt x="931092" y="460498"/>
-                  </a:lnTo>
-                  <a:lnTo>
-                    <a:pt x="1002715" y="593320"/>
-                  </a:lnTo>
-                  <a:lnTo>
-                    <a:pt x="1074337" y="720306"/>
-                  </a:lnTo>
-                  <a:lnTo>
-                    <a:pt x="1145960" y="841713"/>
-                  </a:lnTo>
-                  <a:lnTo>
-                    <a:pt x="1217582" y="957786"/>
-                  </a:lnTo>
-                  <a:lnTo>
-                    <a:pt x="1289205" y="1068760"/>
-                  </a:lnTo>
-                  <a:lnTo>
-                    <a:pt x="1360827" y="1174859"/>
-                  </a:lnTo>
-                  <a:lnTo>
-                    <a:pt x="1432450" y="1276296"/>
-                  </a:lnTo>
-                  <a:lnTo>
-                    <a:pt x="1504073" y="1373277"/>
-                  </a:lnTo>
-                  <a:lnTo>
-                    <a:pt x="1575695" y="1465997"/>
-                  </a:lnTo>
-                  <a:lnTo>
-                    <a:pt x="1647318" y="1554643"/>
-                  </a:lnTo>
-                  <a:lnTo>
-                    <a:pt x="1718940" y="1639395"/>
-                  </a:lnTo>
-                  <a:lnTo>
-                    <a:pt x="1790563" y="1720424"/>
-                  </a:lnTo>
-                  <a:lnTo>
-                    <a:pt x="1862185" y="1797892"/>
-                  </a:lnTo>
-                  <a:lnTo>
-                    <a:pt x="1933808" y="1871957"/>
-                  </a:lnTo>
-                  <a:lnTo>
-                    <a:pt x="2005430" y="1942769"/>
-                  </a:lnTo>
-                  <a:lnTo>
-                    <a:pt x="2077053" y="2010469"/>
-                  </a:lnTo>
-                  <a:lnTo>
-                    <a:pt x="2148675" y="2075195"/>
-                  </a:lnTo>
-                  <a:lnTo>
-                    <a:pt x="2220298" y="2137077"/>
-                  </a:lnTo>
-                  <a:lnTo>
-                    <a:pt x="2291920" y="2196241"/>
-                  </a:lnTo>
-                  <a:lnTo>
-                    <a:pt x="2363543" y="2252806"/>
-                  </a:lnTo>
-                  <a:lnTo>
-                    <a:pt x="2435165" y="2306885"/>
-                  </a:lnTo>
-                  <a:lnTo>
-                    <a:pt x="2506788" y="2358588"/>
-                  </a:lnTo>
-                  <a:lnTo>
-                    <a:pt x="2578410" y="2408020"/>
-                  </a:lnTo>
-                  <a:lnTo>
-                    <a:pt x="2650033" y="2455281"/>
-                  </a:lnTo>
-                  <a:lnTo>
-                    <a:pt x="2721655" y="2500464"/>
-                  </a:lnTo>
-                  <a:lnTo>
-                    <a:pt x="2793278" y="2543663"/>
-                  </a:lnTo>
-                  <a:lnTo>
-                    <a:pt x="2864901" y="2584964"/>
-                  </a:lnTo>
-                  <a:lnTo>
-                    <a:pt x="2936523" y="2624451"/>
-                  </a:lnTo>
-                  <a:lnTo>
-                    <a:pt x="3008146" y="2647889"/>
-                  </a:lnTo>
-                  <a:lnTo>
-                    <a:pt x="3079768" y="2617285"/>
-                  </a:lnTo>
-                  <a:lnTo>
-                    <a:pt x="3151391" y="2585560"/>
-                  </a:lnTo>
-                  <a:lnTo>
-                    <a:pt x="3223013" y="2552674"/>
-                  </a:lnTo>
-                  <a:lnTo>
-                    <a:pt x="3294636" y="2518584"/>
-                  </a:lnTo>
-                  <a:lnTo>
-                    <a:pt x="3366258" y="2483245"/>
-                  </a:lnTo>
-                  <a:lnTo>
-                    <a:pt x="3437881" y="2446613"/>
-                  </a:lnTo>
-                  <a:lnTo>
-                    <a:pt x="3509503" y="2408639"/>
-                  </a:lnTo>
-                  <a:lnTo>
-                    <a:pt x="3581126" y="2369275"/>
-                  </a:lnTo>
-                  <a:lnTo>
-                    <a:pt x="3652748" y="2328470"/>
-                  </a:lnTo>
-                  <a:lnTo>
-                    <a:pt x="3724371" y="2286170"/>
-                  </a:lnTo>
-                  <a:lnTo>
-                    <a:pt x="3795993" y="2242322"/>
-                  </a:lnTo>
-                  <a:lnTo>
-                    <a:pt x="3867616" y="2196869"/>
-                  </a:lnTo>
-                  <a:lnTo>
-                    <a:pt x="3939238" y="2149751"/>
-                  </a:lnTo>
-                  <a:lnTo>
-                    <a:pt x="4010861" y="2100908"/>
-                  </a:lnTo>
-                  <a:lnTo>
-                    <a:pt x="4082483" y="2050277"/>
-                  </a:lnTo>
-                  <a:lnTo>
-                    <a:pt x="4154106" y="1997791"/>
-                  </a:lnTo>
-                  <a:lnTo>
-                    <a:pt x="4225729" y="1943385"/>
-                  </a:lnTo>
-                  <a:lnTo>
-                    <a:pt x="4297351" y="1886986"/>
-                  </a:lnTo>
-                  <a:lnTo>
-                    <a:pt x="4368974" y="1828522"/>
-                  </a:lnTo>
-                  <a:lnTo>
-                    <a:pt x="4440596" y="1767917"/>
-                  </a:lnTo>
-                  <a:lnTo>
-                    <a:pt x="4512219" y="1705094"/>
-                  </a:lnTo>
-                  <a:lnTo>
-                    <a:pt x="4583841" y="1639970"/>
-                  </a:lnTo>
-                  <a:lnTo>
-                    <a:pt x="4655464" y="1572462"/>
-                  </a:lnTo>
-                  <a:lnTo>
-                    <a:pt x="4727086" y="1502482"/>
-                  </a:lnTo>
-                  <a:lnTo>
-                    <a:pt x="4798709" y="1429940"/>
-                  </a:lnTo>
-                  <a:lnTo>
-                    <a:pt x="4870331" y="1354742"/>
-                  </a:lnTo>
-                  <a:lnTo>
-                    <a:pt x="4941954" y="1276791"/>
-                  </a:lnTo>
-                  <a:lnTo>
-                    <a:pt x="5013576" y="1195985"/>
-                  </a:lnTo>
-                  <a:lnTo>
-                    <a:pt x="5085199" y="1112221"/>
-                  </a:lnTo>
-                  <a:lnTo>
-                    <a:pt x="5156821" y="1025390"/>
-                  </a:lnTo>
-                  <a:lnTo>
-                    <a:pt x="5228444" y="935379"/>
-                  </a:lnTo>
-                  <a:lnTo>
-                    <a:pt x="5300066" y="842073"/>
-                  </a:lnTo>
-                  <a:lnTo>
-                    <a:pt x="5371689" y="745351"/>
-                  </a:lnTo>
-                  <a:lnTo>
-                    <a:pt x="5443311" y="645087"/>
-                  </a:lnTo>
-                  <a:lnTo>
-                    <a:pt x="5514934" y="541152"/>
-                  </a:lnTo>
-                  <a:lnTo>
-                    <a:pt x="5586557" y="433412"/>
-                  </a:lnTo>
-                  <a:lnTo>
-                    <a:pt x="5658179" y="321727"/>
-                  </a:lnTo>
-                  <a:lnTo>
-                    <a:pt x="5729802" y="205952"/>
-                  </a:lnTo>
-                  <a:lnTo>
-                    <a:pt x="5801424" y="85939"/>
-                  </a:lnTo>
-                  <a:lnTo>
-                    <a:pt x="5850900" y="0"/>
+                    <a:pt x="787847" y="81170"/>
+                  </a:lnTo>
+                  <a:lnTo>
+                    <a:pt x="859470" y="233295"/>
+                  </a:lnTo>
+                  <a:lnTo>
+                    <a:pt x="931092" y="378619"/>
+                  </a:lnTo>
+                  <a:lnTo>
+                    <a:pt x="1002715" y="517445"/>
+                  </a:lnTo>
+                  <a:lnTo>
+                    <a:pt x="1074337" y="650065"/>
+                  </a:lnTo>
+                  <a:lnTo>
+                    <a:pt x="1145960" y="776755"/>
+                  </a:lnTo>
+                  <a:lnTo>
+                    <a:pt x="1217582" y="897782"/>
+                  </a:lnTo>
+                  <a:lnTo>
+                    <a:pt x="1289205" y="1013397"/>
+                  </a:lnTo>
+                  <a:lnTo>
+                    <a:pt x="1360827" y="1123843"/>
+                  </a:lnTo>
+                  <a:lnTo>
+                    <a:pt x="1432450" y="1229352"/>
+                  </a:lnTo>
+                  <a:lnTo>
+                    <a:pt x="1504073" y="1330143"/>
+                  </a:lnTo>
+                  <a:lnTo>
+                    <a:pt x="1575695" y="1426428"/>
+                  </a:lnTo>
+                  <a:lnTo>
+                    <a:pt x="1647318" y="1518408"/>
+                  </a:lnTo>
+                  <a:lnTo>
+                    <a:pt x="1718940" y="1606276"/>
+                  </a:lnTo>
+                  <a:lnTo>
+                    <a:pt x="1790563" y="1690216"/>
+                  </a:lnTo>
+                  <a:lnTo>
+                    <a:pt x="1862185" y="1770402"/>
+                  </a:lnTo>
+                  <a:lnTo>
+                    <a:pt x="1933808" y="1847004"/>
+                  </a:lnTo>
+                  <a:lnTo>
+                    <a:pt x="2005430" y="1920180"/>
+                  </a:lnTo>
+                  <a:lnTo>
+                    <a:pt x="2077053" y="1990086"/>
+                  </a:lnTo>
+                  <a:lnTo>
+                    <a:pt x="2148675" y="2056865"/>
+                  </a:lnTo>
+                  <a:lnTo>
+                    <a:pt x="2220298" y="2120659"/>
+                  </a:lnTo>
+                  <a:lnTo>
+                    <a:pt x="2291920" y="2181601"/>
+                  </a:lnTo>
+                  <a:lnTo>
+                    <a:pt x="2363543" y="2239819"/>
+                  </a:lnTo>
+                  <a:lnTo>
+                    <a:pt x="2435165" y="2295433"/>
+                  </a:lnTo>
+                  <a:lnTo>
+                    <a:pt x="2506788" y="2348561"/>
+                  </a:lnTo>
+                  <a:lnTo>
+                    <a:pt x="2578410" y="2399314"/>
+                  </a:lnTo>
+                  <a:lnTo>
+                    <a:pt x="2650033" y="2447798"/>
+                  </a:lnTo>
+                  <a:lnTo>
+                    <a:pt x="2721655" y="2494114"/>
+                  </a:lnTo>
+                  <a:lnTo>
+                    <a:pt x="2793278" y="2538359"/>
+                  </a:lnTo>
+                  <a:lnTo>
+                    <a:pt x="2864901" y="2580626"/>
+                  </a:lnTo>
+                  <a:lnTo>
+                    <a:pt x="2936523" y="2621004"/>
+                  </a:lnTo>
+                  <a:lnTo>
+                    <a:pt x="3008146" y="2650090"/>
+                  </a:lnTo>
+                  <a:lnTo>
+                    <a:pt x="3079768" y="2619512"/>
+                  </a:lnTo>
+                  <a:lnTo>
+                    <a:pt x="3151391" y="2587811"/>
+                  </a:lnTo>
+                  <a:lnTo>
+                    <a:pt x="3223013" y="2554948"/>
+                  </a:lnTo>
+                  <a:lnTo>
+                    <a:pt x="3294636" y="2520879"/>
+                  </a:lnTo>
+                  <a:lnTo>
+                    <a:pt x="3366258" y="2485561"/>
+                  </a:lnTo>
+                  <a:lnTo>
+                    <a:pt x="3437881" y="2448947"/>
+                  </a:lnTo>
+                  <a:lnTo>
+                    <a:pt x="3509503" y="2410990"/>
+                  </a:lnTo>
+                  <a:lnTo>
+                    <a:pt x="3581126" y="2371641"/>
+                  </a:lnTo>
+                  <a:lnTo>
+                    <a:pt x="3652748" y="2330848"/>
+                  </a:lnTo>
+                  <a:lnTo>
+                    <a:pt x="3724371" y="2288560"/>
+                  </a:lnTo>
+                  <a:lnTo>
+                    <a:pt x="3795993" y="2244720"/>
+                  </a:lnTo>
+                  <a:lnTo>
+                    <a:pt x="3867616" y="2199272"/>
+                  </a:lnTo>
+                  <a:lnTo>
+                    <a:pt x="3939238" y="2152157"/>
+                  </a:lnTo>
+                  <a:lnTo>
+                    <a:pt x="4010861" y="2103313"/>
+                  </a:lnTo>
+                  <a:lnTo>
+                    <a:pt x="4082483" y="2052679"/>
+                  </a:lnTo>
+                  <a:lnTo>
+                    <a:pt x="4154106" y="2000186"/>
+                  </a:lnTo>
+                  <a:lnTo>
+                    <a:pt x="4225729" y="1945769"/>
+                  </a:lnTo>
+                  <a:lnTo>
+                    <a:pt x="4297351" y="1889355"/>
+                  </a:lnTo>
+                  <a:lnTo>
+                    <a:pt x="4368974" y="1830872"/>
+                  </a:lnTo>
+                  <a:lnTo>
+                    <a:pt x="4440596" y="1770244"/>
+                  </a:lnTo>
+                  <a:lnTo>
+                    <a:pt x="4512219" y="1707392"/>
+                  </a:lnTo>
+                  <a:lnTo>
+                    <a:pt x="4583841" y="1642235"/>
+                  </a:lnTo>
+                  <a:lnTo>
+                    <a:pt x="4655464" y="1574688"/>
+                  </a:lnTo>
+                  <a:lnTo>
+                    <a:pt x="4727086" y="1504663"/>
+                  </a:lnTo>
+                  <a:lnTo>
+                    <a:pt x="4798709" y="1432069"/>
+                  </a:lnTo>
+                  <a:lnTo>
+                    <a:pt x="4870331" y="1356813"/>
+                  </a:lnTo>
+                  <a:lnTo>
+                    <a:pt x="4941954" y="1278796"/>
+                  </a:lnTo>
+                  <a:lnTo>
+                    <a:pt x="5013576" y="1197917"/>
+                  </a:lnTo>
+                  <a:lnTo>
+                    <a:pt x="5085199" y="1114072"/>
+                  </a:lnTo>
+                  <a:lnTo>
+                    <a:pt x="5156821" y="1027152"/>
+                  </a:lnTo>
+                  <a:lnTo>
+                    <a:pt x="5228444" y="937043"/>
+                  </a:lnTo>
+                  <a:lnTo>
+                    <a:pt x="5300066" y="843629"/>
+                  </a:lnTo>
+                  <a:lnTo>
+                    <a:pt x="5371689" y="746788"/>
+                  </a:lnTo>
+                  <a:lnTo>
+                    <a:pt x="5443311" y="646395"/>
+                  </a:lnTo>
+                  <a:lnTo>
+                    <a:pt x="5514934" y="542320"/>
+                  </a:lnTo>
+                  <a:lnTo>
+                    <a:pt x="5586557" y="434428"/>
+                  </a:lnTo>
+                  <a:lnTo>
+                    <a:pt x="5658179" y="322577"/>
+                  </a:lnTo>
+                  <a:lnTo>
+                    <a:pt x="5729802" y="206624"/>
+                  </a:lnTo>
+                  <a:lnTo>
+                    <a:pt x="5801424" y="86418"/>
+                  </a:lnTo>
+                  <a:lnTo>
+                    <a:pt x="5851093" y="0"/>
                   </a:lnTo>
                   <a:lnTo>
                     <a:pt x="7090630" y="0"/>
                   </a:lnTo>
                   <a:lnTo>
-                    <a:pt x="7090630" y="3420293"/>
-                  </a:lnTo>
-                  <a:lnTo>
-                    <a:pt x="7019007" y="3417377"/>
-                  </a:lnTo>
-                  <a:lnTo>
-                    <a:pt x="6947385" y="3414327"/>
-                  </a:lnTo>
-                  <a:lnTo>
-                    <a:pt x="6875762" y="3411137"/>
-                  </a:lnTo>
-                  <a:lnTo>
-                    <a:pt x="6804139" y="3407801"/>
-                  </a:lnTo>
-                  <a:lnTo>
-                    <a:pt x="6732517" y="3404311"/>
-                  </a:lnTo>
-                  <a:lnTo>
-                    <a:pt x="6660894" y="3400660"/>
-                  </a:lnTo>
-                  <a:lnTo>
-                    <a:pt x="6589272" y="3396843"/>
-                  </a:lnTo>
-                  <a:lnTo>
-                    <a:pt x="6517649" y="3392849"/>
-                  </a:lnTo>
-                  <a:lnTo>
-                    <a:pt x="6446027" y="3388672"/>
-                  </a:lnTo>
-                  <a:lnTo>
-                    <a:pt x="6374404" y="3384303"/>
-                  </a:lnTo>
-                  <a:lnTo>
-                    <a:pt x="6302782" y="3379734"/>
-                  </a:lnTo>
-                  <a:lnTo>
-                    <a:pt x="6231159" y="3374954"/>
-                  </a:lnTo>
-                  <a:lnTo>
-                    <a:pt x="6159537" y="3369955"/>
-                  </a:lnTo>
-                  <a:lnTo>
-                    <a:pt x="6087914" y="3364726"/>
-                  </a:lnTo>
-                  <a:lnTo>
-                    <a:pt x="6016292" y="3359257"/>
-                  </a:lnTo>
-                  <a:lnTo>
-                    <a:pt x="5944669" y="3353536"/>
-                  </a:lnTo>
-                  <a:lnTo>
-                    <a:pt x="5873047" y="3347553"/>
-                  </a:lnTo>
-                  <a:lnTo>
-                    <a:pt x="5801424" y="3341294"/>
-                  </a:lnTo>
-                  <a:lnTo>
-                    <a:pt x="5729802" y="3334748"/>
-                  </a:lnTo>
-                  <a:lnTo>
-                    <a:pt x="5658179" y="3327901"/>
-                  </a:lnTo>
-                  <a:lnTo>
-                    <a:pt x="5586557" y="3320740"/>
-                  </a:lnTo>
-                  <a:lnTo>
-                    <a:pt x="5514934" y="3313249"/>
-                  </a:lnTo>
-                  <a:lnTo>
-                    <a:pt x="5443311" y="3305415"/>
-                  </a:lnTo>
-                  <a:lnTo>
-                    <a:pt x="5371689" y="3297220"/>
-                  </a:lnTo>
-                  <a:lnTo>
-                    <a:pt x="5300066" y="3288649"/>
-                  </a:lnTo>
-                  <a:lnTo>
-                    <a:pt x="5228444" y="3279684"/>
-                  </a:lnTo>
-                  <a:lnTo>
-                    <a:pt x="5156821" y="3270306"/>
-                  </a:lnTo>
-                  <a:lnTo>
-                    <a:pt x="5085199" y="3260498"/>
-                  </a:lnTo>
-                  <a:lnTo>
-                    <a:pt x="5013576" y="3250240"/>
-                  </a:lnTo>
-                  <a:lnTo>
-                    <a:pt x="4941954" y="3239509"/>
-                  </a:lnTo>
-                  <a:lnTo>
-                    <a:pt x="4870331" y="3228286"/>
-                  </a:lnTo>
-                  <a:lnTo>
-                    <a:pt x="4798709" y="3216547"/>
-                  </a:lnTo>
-                  <a:lnTo>
-                    <a:pt x="4727086" y="3204269"/>
-                  </a:lnTo>
-                  <a:lnTo>
-                    <a:pt x="4655464" y="3191426"/>
-                  </a:lnTo>
-                  <a:lnTo>
-                    <a:pt x="4583841" y="3177994"/>
-                  </a:lnTo>
-                  <a:lnTo>
-                    <a:pt x="4512219" y="3163944"/>
-                  </a:lnTo>
-                  <a:lnTo>
-                    <a:pt x="4440596" y="3149248"/>
-                  </a:lnTo>
-                  <a:lnTo>
-                    <a:pt x="4368974" y="3133877"/>
-                  </a:lnTo>
-                  <a:lnTo>
-                    <a:pt x="4297351" y="3117800"/>
-                  </a:lnTo>
-                  <a:lnTo>
-                    <a:pt x="4225729" y="3100984"/>
-                  </a:lnTo>
-                  <a:lnTo>
-                    <a:pt x="4154106" y="3083395"/>
-                  </a:lnTo>
-                  <a:lnTo>
-                    <a:pt x="4082483" y="3064998"/>
-                  </a:lnTo>
-                  <a:lnTo>
-                    <a:pt x="4010861" y="3045755"/>
-                  </a:lnTo>
-                  <a:lnTo>
-                    <a:pt x="3939238" y="3025629"/>
-                  </a:lnTo>
-                  <a:lnTo>
-                    <a:pt x="3867616" y="3004577"/>
-                  </a:lnTo>
-                  <a:lnTo>
-                    <a:pt x="3795993" y="2982558"/>
-                  </a:lnTo>
-                  <a:lnTo>
-                    <a:pt x="3724371" y="2959528"/>
-                  </a:lnTo>
-                  <a:lnTo>
-                    <a:pt x="3652748" y="2935439"/>
-                  </a:lnTo>
-                  <a:lnTo>
-                    <a:pt x="3581126" y="2910243"/>
-                  </a:lnTo>
-                  <a:lnTo>
-                    <a:pt x="3509503" y="2883889"/>
-                  </a:lnTo>
-                  <a:lnTo>
-                    <a:pt x="3437881" y="2856324"/>
-                  </a:lnTo>
-                  <a:lnTo>
-                    <a:pt x="3366258" y="2827493"/>
-                  </a:lnTo>
-                  <a:lnTo>
-                    <a:pt x="3294636" y="2797337"/>
-                  </a:lnTo>
-                  <a:lnTo>
-                    <a:pt x="3223013" y="2765795"/>
-                  </a:lnTo>
-                  <a:lnTo>
-                    <a:pt x="3151391" y="2732803"/>
-                  </a:lnTo>
-                  <a:lnTo>
-                    <a:pt x="3079768" y="2698296"/>
-                  </a:lnTo>
-                  <a:lnTo>
-                    <a:pt x="3008146" y="2662203"/>
-                  </a:lnTo>
-                  <a:lnTo>
-                    <a:pt x="2936523" y="2677412"/>
-                  </a:lnTo>
-                  <a:lnTo>
-                    <a:pt x="2864901" y="2705893"/>
-                  </a:lnTo>
-                  <a:lnTo>
-                    <a:pt x="2793278" y="2733367"/>
-                  </a:lnTo>
-                  <a:lnTo>
-                    <a:pt x="2721655" y="2759871"/>
-                  </a:lnTo>
-                  <a:lnTo>
-                    <a:pt x="2650033" y="2785439"/>
-                  </a:lnTo>
-                  <a:lnTo>
-                    <a:pt x="2578410" y="2810104"/>
-                  </a:lnTo>
-                  <a:lnTo>
-                    <a:pt x="2506788" y="2833897"/>
-                  </a:lnTo>
-                  <a:lnTo>
-                    <a:pt x="2435165" y="2856850"/>
-                  </a:lnTo>
-                  <a:lnTo>
-                    <a:pt x="2363543" y="2878993"/>
-                  </a:lnTo>
-                  <a:lnTo>
-                    <a:pt x="2291920" y="2900353"/>
-                  </a:lnTo>
-                  <a:lnTo>
-                    <a:pt x="2220298" y="2920959"/>
-                  </a:lnTo>
-                  <a:lnTo>
-                    <a:pt x="2148675" y="2940837"/>
-                  </a:lnTo>
-                  <a:lnTo>
-                    <a:pt x="2077053" y="2960013"/>
-                  </a:lnTo>
-                  <a:lnTo>
-                    <a:pt x="2005430" y="2978512"/>
-                  </a:lnTo>
-                  <a:lnTo>
-                    <a:pt x="1933808" y="2996357"/>
-                  </a:lnTo>
-                  <a:lnTo>
-                    <a:pt x="1862185" y="3013572"/>
-                  </a:lnTo>
-                  <a:lnTo>
-                    <a:pt x="1790563" y="3030179"/>
-                  </a:lnTo>
-                  <a:lnTo>
-                    <a:pt x="1718940" y="3046200"/>
-                  </a:lnTo>
-                  <a:lnTo>
-                    <a:pt x="1647318" y="3061654"/>
-                  </a:lnTo>
-                  <a:lnTo>
-                    <a:pt x="1575695" y="3076563"/>
-                  </a:lnTo>
-                  <a:lnTo>
-                    <a:pt x="1504073" y="3090945"/>
-                  </a:lnTo>
-                  <a:lnTo>
-                    <a:pt x="1432450" y="3104819"/>
-                  </a:lnTo>
-                  <a:lnTo>
-                    <a:pt x="1360827" y="3118203"/>
-                  </a:lnTo>
-                  <a:lnTo>
-                    <a:pt x="1289205" y="3131114"/>
-                  </a:lnTo>
-                  <a:lnTo>
-                    <a:pt x="1217582" y="3143569"/>
-                  </a:lnTo>
-                  <a:lnTo>
-                    <a:pt x="1145960" y="3155585"/>
-                  </a:lnTo>
-                  <a:lnTo>
-                    <a:pt x="1074337" y="3167176"/>
-                  </a:lnTo>
-                  <a:lnTo>
-                    <a:pt x="1002715" y="3178357"/>
-                  </a:lnTo>
-                  <a:lnTo>
-                    <a:pt x="931092" y="3189144"/>
-                  </a:lnTo>
-                  <a:lnTo>
-                    <a:pt x="859470" y="3199549"/>
-                  </a:lnTo>
-                  <a:lnTo>
-                    <a:pt x="787847" y="3209587"/>
-                  </a:lnTo>
-                  <a:lnTo>
-                    <a:pt x="716225" y="3219271"/>
-                  </a:lnTo>
-                  <a:lnTo>
-                    <a:pt x="644602" y="3228612"/>
-                  </a:lnTo>
-                  <a:lnTo>
-                    <a:pt x="572980" y="3237624"/>
-                  </a:lnTo>
-                  <a:lnTo>
-                    <a:pt x="501357" y="3246317"/>
-                  </a:lnTo>
-                  <a:lnTo>
-                    <a:pt x="429735" y="3254703"/>
-                  </a:lnTo>
-                  <a:lnTo>
-                    <a:pt x="358112" y="3262793"/>
-                  </a:lnTo>
-                  <a:lnTo>
-                    <a:pt x="286490" y="3270598"/>
-                  </a:lnTo>
-                  <a:lnTo>
-                    <a:pt x="214867" y="3278126"/>
-                  </a:lnTo>
-                  <a:lnTo>
-                    <a:pt x="143245" y="3285389"/>
-                  </a:lnTo>
-                  <a:lnTo>
-                    <a:pt x="71622" y="3292395"/>
-                  </a:lnTo>
-                  <a:lnTo>
-                    <a:pt x="0" y="3299154"/>
+                    <a:pt x="7090630" y="3422967"/>
+                  </a:lnTo>
+                  <a:lnTo>
+                    <a:pt x="7019007" y="3420122"/>
+                  </a:lnTo>
+                  <a:lnTo>
+                    <a:pt x="6947385" y="3417145"/>
+                  </a:lnTo>
+                  <a:lnTo>
+                    <a:pt x="6875762" y="3414028"/>
+                  </a:lnTo>
+                  <a:lnTo>
+                    <a:pt x="6804139" y="3410765"/>
+                  </a:lnTo>
+                  <a:lnTo>
+                    <a:pt x="6732517" y="3407349"/>
+                  </a:lnTo>
+                  <a:lnTo>
+                    <a:pt x="6660894" y="3403774"/>
+                  </a:lnTo>
+                  <a:lnTo>
+                    <a:pt x="6589272" y="3400031"/>
+                  </a:lnTo>
+                  <a:lnTo>
+                    <a:pt x="6517649" y="3396113"/>
+                  </a:lnTo>
+                  <a:lnTo>
+                    <a:pt x="6446027" y="3392011"/>
+                  </a:lnTo>
+                  <a:lnTo>
+                    <a:pt x="6374404" y="3387718"/>
+                  </a:lnTo>
+                  <a:lnTo>
+                    <a:pt x="6302782" y="3383224"/>
+                  </a:lnTo>
+                  <a:lnTo>
+                    <a:pt x="6231159" y="3378519"/>
+                  </a:lnTo>
+                  <a:lnTo>
+                    <a:pt x="6159537" y="3373595"/>
+                  </a:lnTo>
+                  <a:lnTo>
+                    <a:pt x="6087914" y="3368439"/>
+                  </a:lnTo>
+                  <a:lnTo>
+                    <a:pt x="6016292" y="3363043"/>
+                  </a:lnTo>
+                  <a:lnTo>
+                    <a:pt x="5944669" y="3357394"/>
+                  </a:lnTo>
+                  <a:lnTo>
+                    <a:pt x="5873047" y="3351480"/>
+                  </a:lnTo>
+                  <a:lnTo>
+                    <a:pt x="5801424" y="3345290"/>
+                  </a:lnTo>
+                  <a:lnTo>
+                    <a:pt x="5729802" y="3338810"/>
+                  </a:lnTo>
+                  <a:lnTo>
+                    <a:pt x="5658179" y="3332027"/>
+                  </a:lnTo>
+                  <a:lnTo>
+                    <a:pt x="5586557" y="3324926"/>
+                  </a:lnTo>
+                  <a:lnTo>
+                    <a:pt x="5514934" y="3317493"/>
+                  </a:lnTo>
+                  <a:lnTo>
+                    <a:pt x="5443311" y="3309713"/>
+                  </a:lnTo>
+                  <a:lnTo>
+                    <a:pt x="5371689" y="3301568"/>
+                  </a:lnTo>
+                  <a:lnTo>
+                    <a:pt x="5300066" y="3293041"/>
+                  </a:lnTo>
+                  <a:lnTo>
+                    <a:pt x="5228444" y="3284116"/>
+                  </a:lnTo>
+                  <a:lnTo>
+                    <a:pt x="5156821" y="3274773"/>
+                  </a:lnTo>
+                  <a:lnTo>
+                    <a:pt x="5085199" y="3264993"/>
+                  </a:lnTo>
+                  <a:lnTo>
+                    <a:pt x="5013576" y="3254755"/>
+                  </a:lnTo>
+                  <a:lnTo>
+                    <a:pt x="4941954" y="3244038"/>
+                  </a:lnTo>
+                  <a:lnTo>
+                    <a:pt x="4870331" y="3232819"/>
+                  </a:lnTo>
+                  <a:lnTo>
+                    <a:pt x="4798709" y="3221076"/>
+                  </a:lnTo>
+                  <a:lnTo>
+                    <a:pt x="4727086" y="3208782"/>
+                  </a:lnTo>
+                  <a:lnTo>
+                    <a:pt x="4655464" y="3195914"/>
+                  </a:lnTo>
+                  <a:lnTo>
+                    <a:pt x="4583841" y="3182443"/>
+                  </a:lnTo>
+                  <a:lnTo>
+                    <a:pt x="4512219" y="3168341"/>
+                  </a:lnTo>
+                  <a:lnTo>
+                    <a:pt x="4440596" y="3153580"/>
+                  </a:lnTo>
+                  <a:lnTo>
+                    <a:pt x="4368974" y="3138128"/>
+                  </a:lnTo>
+                  <a:lnTo>
+                    <a:pt x="4297351" y="3121952"/>
+                  </a:lnTo>
+                  <a:lnTo>
+                    <a:pt x="4225729" y="3105020"/>
+                  </a:lnTo>
+                  <a:lnTo>
+                    <a:pt x="4154106" y="3087295"/>
+                  </a:lnTo>
+                  <a:lnTo>
+                    <a:pt x="4082483" y="3068741"/>
+                  </a:lnTo>
+                  <a:lnTo>
+                    <a:pt x="4010861" y="3049318"/>
+                  </a:lnTo>
+                  <a:lnTo>
+                    <a:pt x="3939238" y="3028986"/>
+                  </a:lnTo>
+                  <a:lnTo>
+                    <a:pt x="3867616" y="3007703"/>
+                  </a:lnTo>
+                  <a:lnTo>
+                    <a:pt x="3795993" y="2985424"/>
+                  </a:lnTo>
+                  <a:lnTo>
+                    <a:pt x="3724371" y="2962101"/>
+                  </a:lnTo>
+                  <a:lnTo>
+                    <a:pt x="3652748" y="2937688"/>
+                  </a:lnTo>
+                  <a:lnTo>
+                    <a:pt x="3581126" y="2912132"/>
+                  </a:lnTo>
+                  <a:lnTo>
+                    <a:pt x="3509503" y="2885379"/>
+                  </a:lnTo>
+                  <a:lnTo>
+                    <a:pt x="3437881" y="2857375"/>
+                  </a:lnTo>
+                  <a:lnTo>
+                    <a:pt x="3366258" y="2828060"/>
+                  </a:lnTo>
+                  <a:lnTo>
+                    <a:pt x="3294636" y="2797373"/>
+                  </a:lnTo>
+                  <a:lnTo>
+                    <a:pt x="3223013" y="2765250"/>
+                  </a:lnTo>
+                  <a:lnTo>
+                    <a:pt x="3151391" y="2731624"/>
+                  </a:lnTo>
+                  <a:lnTo>
+                    <a:pt x="3079768" y="2696423"/>
+                  </a:lnTo>
+                  <a:lnTo>
+                    <a:pt x="3008146" y="2659576"/>
+                  </a:lnTo>
+                  <a:lnTo>
+                    <a:pt x="2936523" y="2679587"/>
+                  </a:lnTo>
+                  <a:lnTo>
+                    <a:pt x="2864901" y="2708040"/>
+                  </a:lnTo>
+                  <a:lnTo>
+                    <a:pt x="2793278" y="2735487"/>
+                  </a:lnTo>
+                  <a:lnTo>
+                    <a:pt x="2721655" y="2761962"/>
+                  </a:lnTo>
+                  <a:lnTo>
+                    <a:pt x="2650033" y="2787501"/>
+                  </a:lnTo>
+                  <a:lnTo>
+                    <a:pt x="2578410" y="2812136"/>
+                  </a:lnTo>
+                  <a:lnTo>
+                    <a:pt x="2506788" y="2835899"/>
+                  </a:lnTo>
+                  <a:lnTo>
+                    <a:pt x="2435165" y="2858822"/>
+                  </a:lnTo>
+                  <a:lnTo>
+                    <a:pt x="2363543" y="2880933"/>
+                  </a:lnTo>
+                  <a:lnTo>
+                    <a:pt x="2291920" y="2902262"/>
+                  </a:lnTo>
+                  <a:lnTo>
+                    <a:pt x="2220298" y="2922836"/>
+                  </a:lnTo>
+                  <a:lnTo>
+                    <a:pt x="2148675" y="2942683"/>
+                  </a:lnTo>
+                  <a:lnTo>
+                    <a:pt x="2077053" y="2961827"/>
+                  </a:lnTo>
+                  <a:lnTo>
+                    <a:pt x="2005430" y="2980294"/>
+                  </a:lnTo>
+                  <a:lnTo>
+                    <a:pt x="1933808" y="2998107"/>
+                  </a:lnTo>
+                  <a:lnTo>
+                    <a:pt x="1862185" y="3015291"/>
+                  </a:lnTo>
+                  <a:lnTo>
+                    <a:pt x="1790563" y="3031866"/>
+                  </a:lnTo>
+                  <a:lnTo>
+                    <a:pt x="1718940" y="3047854"/>
+                  </a:lnTo>
+                  <a:lnTo>
+                    <a:pt x="1647318" y="3063277"/>
+                  </a:lnTo>
+                  <a:lnTo>
+                    <a:pt x="1575695" y="3078155"/>
+                  </a:lnTo>
+                  <a:lnTo>
+                    <a:pt x="1504073" y="3092505"/>
+                  </a:lnTo>
+                  <a:lnTo>
+                    <a:pt x="1432450" y="3106349"/>
+                  </a:lnTo>
+                  <a:lnTo>
+                    <a:pt x="1360827" y="3119702"/>
+                  </a:lnTo>
+                  <a:lnTo>
+                    <a:pt x="1289205" y="3132583"/>
+                  </a:lnTo>
+                  <a:lnTo>
+                    <a:pt x="1217582" y="3145008"/>
+                  </a:lnTo>
+                  <a:lnTo>
+                    <a:pt x="1145960" y="3156993"/>
+                  </a:lnTo>
+                  <a:lnTo>
+                    <a:pt x="1074337" y="3168555"/>
+                  </a:lnTo>
+                  <a:lnTo>
+                    <a:pt x="1002715" y="3179707"/>
+                  </a:lnTo>
+                  <a:lnTo>
+                    <a:pt x="931092" y="3190465"/>
+                  </a:lnTo>
+                  <a:lnTo>
+                    <a:pt x="859470" y="3200842"/>
+                  </a:lnTo>
+                  <a:lnTo>
+                    <a:pt x="787847" y="3210852"/>
+                  </a:lnTo>
+                  <a:lnTo>
+                    <a:pt x="716225" y="3220507"/>
+                  </a:lnTo>
+                  <a:lnTo>
+                    <a:pt x="644602" y="3229821"/>
+                  </a:lnTo>
+                  <a:lnTo>
+                    <a:pt x="572980" y="3238806"/>
+                  </a:lnTo>
+                  <a:lnTo>
+                    <a:pt x="501357" y="3247472"/>
+                  </a:lnTo>
+                  <a:lnTo>
+                    <a:pt x="429735" y="3255832"/>
+                  </a:lnTo>
+                  <a:lnTo>
+                    <a:pt x="358112" y="3263897"/>
+                  </a:lnTo>
+                  <a:lnTo>
+                    <a:pt x="286490" y="3271675"/>
+                  </a:lnTo>
+                  <a:lnTo>
+                    <a:pt x="214867" y="3279179"/>
+                  </a:lnTo>
+                  <a:lnTo>
+                    <a:pt x="143245" y="3286417"/>
+                  </a:lnTo>
+                  <a:lnTo>
+                    <a:pt x="71622" y="3293399"/>
+                  </a:lnTo>
+                  <a:lnTo>
+                    <a:pt x="0" y="3300134"/>
                   </a:lnTo>
                   <a:close/>
                 </a:path>
@@ -3558,234 +3555,231 @@
           </p:nvSpPr>
           <p:spPr>
             <a:xfrm>
-              <a:off x="1877335" y="2073503"/>
-              <a:ext cx="5145614" cy="2647889"/>
+              <a:off x="1923389" y="2073503"/>
+              <a:ext cx="5099753" cy="2650090"/>
             </a:xfrm>
             <a:custGeom>
               <a:avLst/>
               <a:pathLst>
-                <a:path w="5145614" h="2647889">
+                <a:path w="5099753" h="2650090">
                   <a:moveTo>
                     <a:pt x="0" y="0"/>
                   </a:moveTo>
                   <a:lnTo>
-                    <a:pt x="10938" y="24279"/>
-                  </a:lnTo>
-                  <a:lnTo>
-                    <a:pt x="82561" y="176265"/>
-                  </a:lnTo>
-                  <a:lnTo>
-                    <a:pt x="154183" y="321573"/>
-                  </a:lnTo>
-                  <a:lnTo>
-                    <a:pt x="225806" y="460498"/>
-                  </a:lnTo>
-                  <a:lnTo>
-                    <a:pt x="297428" y="593320"/>
-                  </a:lnTo>
-                  <a:lnTo>
-                    <a:pt x="369051" y="720306"/>
-                  </a:lnTo>
-                  <a:lnTo>
-                    <a:pt x="440673" y="841713"/>
-                  </a:lnTo>
-                  <a:lnTo>
-                    <a:pt x="512296" y="957786"/>
-                  </a:lnTo>
-                  <a:lnTo>
-                    <a:pt x="583918" y="1068760"/>
-                  </a:lnTo>
-                  <a:lnTo>
-                    <a:pt x="655541" y="1174859"/>
-                  </a:lnTo>
-                  <a:lnTo>
-                    <a:pt x="727164" y="1276296"/>
-                  </a:lnTo>
-                  <a:lnTo>
-                    <a:pt x="798786" y="1373277"/>
-                  </a:lnTo>
-                  <a:lnTo>
-                    <a:pt x="870409" y="1465997"/>
-                  </a:lnTo>
-                  <a:lnTo>
-                    <a:pt x="942031" y="1554643"/>
-                  </a:lnTo>
-                  <a:lnTo>
-                    <a:pt x="1013654" y="1639395"/>
-                  </a:lnTo>
-                  <a:lnTo>
-                    <a:pt x="1085276" y="1720424"/>
-                  </a:lnTo>
-                  <a:lnTo>
-                    <a:pt x="1156899" y="1797892"/>
-                  </a:lnTo>
-                  <a:lnTo>
-                    <a:pt x="1228521" y="1871957"/>
-                  </a:lnTo>
-                  <a:lnTo>
-                    <a:pt x="1300144" y="1942769"/>
-                  </a:lnTo>
-                  <a:lnTo>
-                    <a:pt x="1371766" y="2010469"/>
-                  </a:lnTo>
-                  <a:lnTo>
-                    <a:pt x="1443389" y="2075195"/>
-                  </a:lnTo>
-                  <a:lnTo>
-                    <a:pt x="1515011" y="2137077"/>
-                  </a:lnTo>
-                  <a:lnTo>
-                    <a:pt x="1586634" y="2196241"/>
-                  </a:lnTo>
-                  <a:lnTo>
-                    <a:pt x="1658256" y="2252806"/>
-                  </a:lnTo>
-                  <a:lnTo>
-                    <a:pt x="1729879" y="2306885"/>
-                  </a:lnTo>
-                  <a:lnTo>
-                    <a:pt x="1801501" y="2358588"/>
-                  </a:lnTo>
-                  <a:lnTo>
-                    <a:pt x="1873124" y="2408020"/>
-                  </a:lnTo>
-                  <a:lnTo>
-                    <a:pt x="1944746" y="2455281"/>
-                  </a:lnTo>
-                  <a:lnTo>
-                    <a:pt x="2016369" y="2500464"/>
-                  </a:lnTo>
-                  <a:lnTo>
-                    <a:pt x="2087992" y="2543663"/>
-                  </a:lnTo>
-                  <a:lnTo>
-                    <a:pt x="2159614" y="2584964"/>
-                  </a:lnTo>
-                  <a:lnTo>
-                    <a:pt x="2231237" y="2624451"/>
-                  </a:lnTo>
-                  <a:lnTo>
-                    <a:pt x="2302859" y="2647889"/>
-                  </a:lnTo>
-                  <a:lnTo>
-                    <a:pt x="2374482" y="2617285"/>
-                  </a:lnTo>
-                  <a:lnTo>
-                    <a:pt x="2446104" y="2585560"/>
-                  </a:lnTo>
-                  <a:lnTo>
-                    <a:pt x="2517727" y="2552674"/>
-                  </a:lnTo>
-                  <a:lnTo>
-                    <a:pt x="2589349" y="2518584"/>
-                  </a:lnTo>
-                  <a:lnTo>
-                    <a:pt x="2660972" y="2483245"/>
-                  </a:lnTo>
-                  <a:lnTo>
-                    <a:pt x="2732594" y="2446613"/>
-                  </a:lnTo>
-                  <a:lnTo>
-                    <a:pt x="2804217" y="2408639"/>
-                  </a:lnTo>
-                  <a:lnTo>
-                    <a:pt x="2875839" y="2369275"/>
-                  </a:lnTo>
-                  <a:lnTo>
-                    <a:pt x="2947462" y="2328470"/>
-                  </a:lnTo>
-                  <a:lnTo>
-                    <a:pt x="3019084" y="2286170"/>
-                  </a:lnTo>
-                  <a:lnTo>
-                    <a:pt x="3090707" y="2242322"/>
-                  </a:lnTo>
-                  <a:lnTo>
-                    <a:pt x="3162329" y="2196869"/>
-                  </a:lnTo>
-                  <a:lnTo>
-                    <a:pt x="3233952" y="2149751"/>
-                  </a:lnTo>
-                  <a:lnTo>
-                    <a:pt x="3305574" y="2100908"/>
-                  </a:lnTo>
-                  <a:lnTo>
-                    <a:pt x="3377197" y="2050277"/>
-                  </a:lnTo>
-                  <a:lnTo>
-                    <a:pt x="3448820" y="1997791"/>
-                  </a:lnTo>
-                  <a:lnTo>
-                    <a:pt x="3520442" y="1943385"/>
-                  </a:lnTo>
-                  <a:lnTo>
-                    <a:pt x="3592065" y="1886986"/>
-                  </a:lnTo>
-                  <a:lnTo>
-                    <a:pt x="3663687" y="1828522"/>
-                  </a:lnTo>
-                  <a:lnTo>
-                    <a:pt x="3735310" y="1767917"/>
-                  </a:lnTo>
-                  <a:lnTo>
-                    <a:pt x="3806932" y="1705094"/>
-                  </a:lnTo>
-                  <a:lnTo>
-                    <a:pt x="3878555" y="1639970"/>
-                  </a:lnTo>
-                  <a:lnTo>
-                    <a:pt x="3950177" y="1572462"/>
-                  </a:lnTo>
-                  <a:lnTo>
-                    <a:pt x="4021800" y="1502482"/>
-                  </a:lnTo>
-                  <a:lnTo>
-                    <a:pt x="4093422" y="1429940"/>
-                  </a:lnTo>
-                  <a:lnTo>
-                    <a:pt x="4165045" y="1354742"/>
-                  </a:lnTo>
-                  <a:lnTo>
-                    <a:pt x="4236667" y="1276791"/>
-                  </a:lnTo>
-                  <a:lnTo>
-                    <a:pt x="4308290" y="1195985"/>
-                  </a:lnTo>
-                  <a:lnTo>
-                    <a:pt x="4379912" y="1112221"/>
-                  </a:lnTo>
-                  <a:lnTo>
-                    <a:pt x="4451535" y="1025390"/>
-                  </a:lnTo>
-                  <a:lnTo>
-                    <a:pt x="4523157" y="935379"/>
-                  </a:lnTo>
-                  <a:lnTo>
-                    <a:pt x="4594780" y="842073"/>
-                  </a:lnTo>
-                  <a:lnTo>
-                    <a:pt x="4666402" y="745351"/>
-                  </a:lnTo>
-                  <a:lnTo>
-                    <a:pt x="4738025" y="645087"/>
-                  </a:lnTo>
-                  <a:lnTo>
-                    <a:pt x="4809648" y="541152"/>
-                  </a:lnTo>
-                  <a:lnTo>
-                    <a:pt x="4881270" y="433412"/>
-                  </a:lnTo>
-                  <a:lnTo>
-                    <a:pt x="4952893" y="321727"/>
-                  </a:lnTo>
-                  <a:lnTo>
-                    <a:pt x="5024515" y="205952"/>
-                  </a:lnTo>
-                  <a:lnTo>
-                    <a:pt x="5096138" y="85939"/>
-                  </a:lnTo>
-                  <a:lnTo>
-                    <a:pt x="5145614" y="0"/>
+                    <a:pt x="36507" y="81170"/>
+                  </a:lnTo>
+                  <a:lnTo>
+                    <a:pt x="108130" y="233295"/>
+                  </a:lnTo>
+                  <a:lnTo>
+                    <a:pt x="179752" y="378619"/>
+                  </a:lnTo>
+                  <a:lnTo>
+                    <a:pt x="251375" y="517445"/>
+                  </a:lnTo>
+                  <a:lnTo>
+                    <a:pt x="322997" y="650065"/>
+                  </a:lnTo>
+                  <a:lnTo>
+                    <a:pt x="394620" y="776755"/>
+                  </a:lnTo>
+                  <a:lnTo>
+                    <a:pt x="466242" y="897782"/>
+                  </a:lnTo>
+                  <a:lnTo>
+                    <a:pt x="537865" y="1013397"/>
+                  </a:lnTo>
+                  <a:lnTo>
+                    <a:pt x="609487" y="1123843"/>
+                  </a:lnTo>
+                  <a:lnTo>
+                    <a:pt x="681110" y="1229352"/>
+                  </a:lnTo>
+                  <a:lnTo>
+                    <a:pt x="752732" y="1330143"/>
+                  </a:lnTo>
+                  <a:lnTo>
+                    <a:pt x="824355" y="1426428"/>
+                  </a:lnTo>
+                  <a:lnTo>
+                    <a:pt x="895977" y="1518408"/>
+                  </a:lnTo>
+                  <a:lnTo>
+                    <a:pt x="967600" y="1606276"/>
+                  </a:lnTo>
+                  <a:lnTo>
+                    <a:pt x="1039222" y="1690216"/>
+                  </a:lnTo>
+                  <a:lnTo>
+                    <a:pt x="1110845" y="1770402"/>
+                  </a:lnTo>
+                  <a:lnTo>
+                    <a:pt x="1182467" y="1847004"/>
+                  </a:lnTo>
+                  <a:lnTo>
+                    <a:pt x="1254090" y="1920180"/>
+                  </a:lnTo>
+                  <a:lnTo>
+                    <a:pt x="1325713" y="1990086"/>
+                  </a:lnTo>
+                  <a:lnTo>
+                    <a:pt x="1397335" y="2056865"/>
+                  </a:lnTo>
+                  <a:lnTo>
+                    <a:pt x="1468958" y="2120659"/>
+                  </a:lnTo>
+                  <a:lnTo>
+                    <a:pt x="1540580" y="2181601"/>
+                  </a:lnTo>
+                  <a:lnTo>
+                    <a:pt x="1612203" y="2239819"/>
+                  </a:lnTo>
+                  <a:lnTo>
+                    <a:pt x="1683825" y="2295433"/>
+                  </a:lnTo>
+                  <a:lnTo>
+                    <a:pt x="1755448" y="2348561"/>
+                  </a:lnTo>
+                  <a:lnTo>
+                    <a:pt x="1827070" y="2399314"/>
+                  </a:lnTo>
+                  <a:lnTo>
+                    <a:pt x="1898693" y="2447798"/>
+                  </a:lnTo>
+                  <a:lnTo>
+                    <a:pt x="1970315" y="2494114"/>
+                  </a:lnTo>
+                  <a:lnTo>
+                    <a:pt x="2041938" y="2538359"/>
+                  </a:lnTo>
+                  <a:lnTo>
+                    <a:pt x="2113560" y="2580626"/>
+                  </a:lnTo>
+                  <a:lnTo>
+                    <a:pt x="2185183" y="2621004"/>
+                  </a:lnTo>
+                  <a:lnTo>
+                    <a:pt x="2256805" y="2650090"/>
+                  </a:lnTo>
+                  <a:lnTo>
+                    <a:pt x="2328428" y="2619512"/>
+                  </a:lnTo>
+                  <a:lnTo>
+                    <a:pt x="2400050" y="2587811"/>
+                  </a:lnTo>
+                  <a:lnTo>
+                    <a:pt x="2471673" y="2554948"/>
+                  </a:lnTo>
+                  <a:lnTo>
+                    <a:pt x="2543295" y="2520879"/>
+                  </a:lnTo>
+                  <a:lnTo>
+                    <a:pt x="2614918" y="2485561"/>
+                  </a:lnTo>
+                  <a:lnTo>
+                    <a:pt x="2686541" y="2448947"/>
+                  </a:lnTo>
+                  <a:lnTo>
+                    <a:pt x="2758163" y="2410990"/>
+                  </a:lnTo>
+                  <a:lnTo>
+                    <a:pt x="2829786" y="2371641"/>
+                  </a:lnTo>
+                  <a:lnTo>
+                    <a:pt x="2901408" y="2330848"/>
+                  </a:lnTo>
+                  <a:lnTo>
+                    <a:pt x="2973031" y="2288560"/>
+                  </a:lnTo>
+                  <a:lnTo>
+                    <a:pt x="3044653" y="2244720"/>
+                  </a:lnTo>
+                  <a:lnTo>
+                    <a:pt x="3116276" y="2199272"/>
+                  </a:lnTo>
+                  <a:lnTo>
+                    <a:pt x="3187898" y="2152157"/>
+                  </a:lnTo>
+                  <a:lnTo>
+                    <a:pt x="3259521" y="2103313"/>
+                  </a:lnTo>
+                  <a:lnTo>
+                    <a:pt x="3331143" y="2052679"/>
+                  </a:lnTo>
+                  <a:lnTo>
+                    <a:pt x="3402766" y="2000186"/>
+                  </a:lnTo>
+                  <a:lnTo>
+                    <a:pt x="3474388" y="1945769"/>
+                  </a:lnTo>
+                  <a:lnTo>
+                    <a:pt x="3546011" y="1889355"/>
+                  </a:lnTo>
+                  <a:lnTo>
+                    <a:pt x="3617633" y="1830872"/>
+                  </a:lnTo>
+                  <a:lnTo>
+                    <a:pt x="3689256" y="1770244"/>
+                  </a:lnTo>
+                  <a:lnTo>
+                    <a:pt x="3760878" y="1707392"/>
+                  </a:lnTo>
+                  <a:lnTo>
+                    <a:pt x="3832501" y="1642235"/>
+                  </a:lnTo>
+                  <a:lnTo>
+                    <a:pt x="3904123" y="1574688"/>
+                  </a:lnTo>
+                  <a:lnTo>
+                    <a:pt x="3975746" y="1504663"/>
+                  </a:lnTo>
+                  <a:lnTo>
+                    <a:pt x="4047369" y="1432069"/>
+                  </a:lnTo>
+                  <a:lnTo>
+                    <a:pt x="4118991" y="1356813"/>
+                  </a:lnTo>
+                  <a:lnTo>
+                    <a:pt x="4190614" y="1278796"/>
+                  </a:lnTo>
+                  <a:lnTo>
+                    <a:pt x="4262236" y="1197917"/>
+                  </a:lnTo>
+                  <a:lnTo>
+                    <a:pt x="4333859" y="1114072"/>
+                  </a:lnTo>
+                  <a:lnTo>
+                    <a:pt x="4405481" y="1027152"/>
+                  </a:lnTo>
+                  <a:lnTo>
+                    <a:pt x="4477104" y="937043"/>
+                  </a:lnTo>
+                  <a:lnTo>
+                    <a:pt x="4548726" y="843629"/>
+                  </a:lnTo>
+                  <a:lnTo>
+                    <a:pt x="4620349" y="746788"/>
+                  </a:lnTo>
+                  <a:lnTo>
+                    <a:pt x="4691971" y="646395"/>
+                  </a:lnTo>
+                  <a:lnTo>
+                    <a:pt x="4763594" y="542320"/>
+                  </a:lnTo>
+                  <a:lnTo>
+                    <a:pt x="4835216" y="434428"/>
+                  </a:lnTo>
+                  <a:lnTo>
+                    <a:pt x="4906839" y="322577"/>
+                  </a:lnTo>
+                  <a:lnTo>
+                    <a:pt x="4978461" y="206624"/>
+                  </a:lnTo>
+                  <a:lnTo>
+                    <a:pt x="5050084" y="86418"/>
+                  </a:lnTo>
+                  <a:lnTo>
+                    <a:pt x="5099753" y="0"/>
                   </a:lnTo>
                 </a:path>
               </a:pathLst>
@@ -3805,312 +3799,312 @@
           </p:nvSpPr>
           <p:spPr>
             <a:xfrm>
-              <a:off x="1172049" y="4735706"/>
-              <a:ext cx="7090630" cy="758090"/>
+              <a:off x="1172049" y="4733079"/>
+              <a:ext cx="7090630" cy="763391"/>
             </a:xfrm>
             <a:custGeom>
               <a:avLst/>
               <a:pathLst>
-                <a:path w="7090630" h="758090">
+                <a:path w="7090630" h="763391">
                   <a:moveTo>
-                    <a:pt x="7090630" y="758090"/>
+                    <a:pt x="7090630" y="763391"/>
                   </a:moveTo>
                   <a:lnTo>
-                    <a:pt x="7019007" y="755174"/>
-                  </a:lnTo>
-                  <a:lnTo>
-                    <a:pt x="6947385" y="752124"/>
-                  </a:lnTo>
-                  <a:lnTo>
-                    <a:pt x="6875762" y="748934"/>
-                  </a:lnTo>
-                  <a:lnTo>
-                    <a:pt x="6804139" y="745598"/>
-                  </a:lnTo>
-                  <a:lnTo>
-                    <a:pt x="6732517" y="742108"/>
-                  </a:lnTo>
-                  <a:lnTo>
-                    <a:pt x="6660894" y="738457"/>
-                  </a:lnTo>
-                  <a:lnTo>
-                    <a:pt x="6589272" y="734639"/>
-                  </a:lnTo>
-                  <a:lnTo>
-                    <a:pt x="6517649" y="730646"/>
-                  </a:lnTo>
-                  <a:lnTo>
-                    <a:pt x="6446027" y="726469"/>
-                  </a:lnTo>
-                  <a:lnTo>
-                    <a:pt x="6374404" y="722100"/>
-                  </a:lnTo>
-                  <a:lnTo>
-                    <a:pt x="6302782" y="717531"/>
-                  </a:lnTo>
-                  <a:lnTo>
-                    <a:pt x="6231159" y="712751"/>
-                  </a:lnTo>
-                  <a:lnTo>
-                    <a:pt x="6159537" y="707752"/>
-                  </a:lnTo>
-                  <a:lnTo>
-                    <a:pt x="6087914" y="702523"/>
-                  </a:lnTo>
-                  <a:lnTo>
-                    <a:pt x="6016292" y="697053"/>
-                  </a:lnTo>
-                  <a:lnTo>
-                    <a:pt x="5944669" y="691333"/>
-                  </a:lnTo>
-                  <a:lnTo>
-                    <a:pt x="5873047" y="685349"/>
-                  </a:lnTo>
-                  <a:lnTo>
-                    <a:pt x="5801424" y="679091"/>
-                  </a:lnTo>
-                  <a:lnTo>
-                    <a:pt x="5729802" y="672545"/>
-                  </a:lnTo>
-                  <a:lnTo>
-                    <a:pt x="5658179" y="665698"/>
-                  </a:lnTo>
-                  <a:lnTo>
-                    <a:pt x="5586557" y="658537"/>
-                  </a:lnTo>
-                  <a:lnTo>
-                    <a:pt x="5514934" y="651046"/>
-                  </a:lnTo>
-                  <a:lnTo>
-                    <a:pt x="5443311" y="643212"/>
-                  </a:lnTo>
-                  <a:lnTo>
-                    <a:pt x="5371689" y="635017"/>
-                  </a:lnTo>
-                  <a:lnTo>
-                    <a:pt x="5300066" y="626446"/>
-                  </a:lnTo>
-                  <a:lnTo>
-                    <a:pt x="5228444" y="617480"/>
-                  </a:lnTo>
-                  <a:lnTo>
-                    <a:pt x="5156821" y="608103"/>
-                  </a:lnTo>
-                  <a:lnTo>
-                    <a:pt x="5085199" y="598295"/>
-                  </a:lnTo>
-                  <a:lnTo>
-                    <a:pt x="5013576" y="588037"/>
-                  </a:lnTo>
-                  <a:lnTo>
-                    <a:pt x="4941954" y="577306"/>
-                  </a:lnTo>
-                  <a:lnTo>
-                    <a:pt x="4870331" y="566083"/>
-                  </a:lnTo>
-                  <a:lnTo>
-                    <a:pt x="4798709" y="554344"/>
-                  </a:lnTo>
-                  <a:lnTo>
-                    <a:pt x="4727086" y="542066"/>
-                  </a:lnTo>
-                  <a:lnTo>
-                    <a:pt x="4655464" y="529223"/>
-                  </a:lnTo>
-                  <a:lnTo>
-                    <a:pt x="4583841" y="515790"/>
-                  </a:lnTo>
-                  <a:lnTo>
-                    <a:pt x="4512219" y="501740"/>
-                  </a:lnTo>
-                  <a:lnTo>
-                    <a:pt x="4440596" y="487045"/>
-                  </a:lnTo>
-                  <a:lnTo>
-                    <a:pt x="4368974" y="471674"/>
-                  </a:lnTo>
-                  <a:lnTo>
-                    <a:pt x="4297351" y="455597"/>
-                  </a:lnTo>
-                  <a:lnTo>
-                    <a:pt x="4225729" y="438781"/>
-                  </a:lnTo>
-                  <a:lnTo>
-                    <a:pt x="4154106" y="421192"/>
-                  </a:lnTo>
-                  <a:lnTo>
-                    <a:pt x="4082483" y="402795"/>
-                  </a:lnTo>
-                  <a:lnTo>
-                    <a:pt x="4010861" y="383552"/>
-                  </a:lnTo>
-                  <a:lnTo>
-                    <a:pt x="3939238" y="363426"/>
-                  </a:lnTo>
-                  <a:lnTo>
-                    <a:pt x="3867616" y="342374"/>
-                  </a:lnTo>
-                  <a:lnTo>
-                    <a:pt x="3795993" y="320355"/>
-                  </a:lnTo>
-                  <a:lnTo>
-                    <a:pt x="3724371" y="297325"/>
-                  </a:lnTo>
-                  <a:lnTo>
-                    <a:pt x="3652748" y="273236"/>
-                  </a:lnTo>
-                  <a:lnTo>
-                    <a:pt x="3581126" y="248040"/>
-                  </a:lnTo>
-                  <a:lnTo>
-                    <a:pt x="3509503" y="221686"/>
-                  </a:lnTo>
-                  <a:lnTo>
-                    <a:pt x="3437881" y="194121"/>
-                  </a:lnTo>
-                  <a:lnTo>
-                    <a:pt x="3366258" y="165290"/>
-                  </a:lnTo>
-                  <a:lnTo>
-                    <a:pt x="3294636" y="135134"/>
-                  </a:lnTo>
-                  <a:lnTo>
-                    <a:pt x="3223013" y="103592"/>
-                  </a:lnTo>
-                  <a:lnTo>
-                    <a:pt x="3151391" y="70600"/>
-                  </a:lnTo>
-                  <a:lnTo>
-                    <a:pt x="3079768" y="36093"/>
+                    <a:pt x="7019007" y="760546"/>
+                  </a:lnTo>
+                  <a:lnTo>
+                    <a:pt x="6947385" y="757569"/>
+                  </a:lnTo>
+                  <a:lnTo>
+                    <a:pt x="6875762" y="754451"/>
+                  </a:lnTo>
+                  <a:lnTo>
+                    <a:pt x="6804139" y="751189"/>
+                  </a:lnTo>
+                  <a:lnTo>
+                    <a:pt x="6732517" y="747773"/>
+                  </a:lnTo>
+                  <a:lnTo>
+                    <a:pt x="6660894" y="744197"/>
+                  </a:lnTo>
+                  <a:lnTo>
+                    <a:pt x="6589272" y="740455"/>
+                  </a:lnTo>
+                  <a:lnTo>
+                    <a:pt x="6517649" y="736537"/>
+                  </a:lnTo>
+                  <a:lnTo>
+                    <a:pt x="6446027" y="732435"/>
+                  </a:lnTo>
+                  <a:lnTo>
+                    <a:pt x="6374404" y="728142"/>
+                  </a:lnTo>
+                  <a:lnTo>
+                    <a:pt x="6302782" y="723648"/>
+                  </a:lnTo>
+                  <a:lnTo>
+                    <a:pt x="6231159" y="718943"/>
+                  </a:lnTo>
+                  <a:lnTo>
+                    <a:pt x="6159537" y="714018"/>
+                  </a:lnTo>
+                  <a:lnTo>
+                    <a:pt x="6087914" y="708863"/>
+                  </a:lnTo>
+                  <a:lnTo>
+                    <a:pt x="6016292" y="703467"/>
+                  </a:lnTo>
+                  <a:lnTo>
+                    <a:pt x="5944669" y="697818"/>
+                  </a:lnTo>
+                  <a:lnTo>
+                    <a:pt x="5873047" y="691904"/>
+                  </a:lnTo>
+                  <a:lnTo>
+                    <a:pt x="5801424" y="685714"/>
+                  </a:lnTo>
+                  <a:lnTo>
+                    <a:pt x="5729802" y="679234"/>
+                  </a:lnTo>
+                  <a:lnTo>
+                    <a:pt x="5658179" y="672451"/>
+                  </a:lnTo>
+                  <a:lnTo>
+                    <a:pt x="5586557" y="665350"/>
+                  </a:lnTo>
+                  <a:lnTo>
+                    <a:pt x="5514934" y="657917"/>
+                  </a:lnTo>
+                  <a:lnTo>
+                    <a:pt x="5443311" y="650136"/>
+                  </a:lnTo>
+                  <a:lnTo>
+                    <a:pt x="5371689" y="641991"/>
+                  </a:lnTo>
+                  <a:lnTo>
+                    <a:pt x="5300066" y="633465"/>
+                  </a:lnTo>
+                  <a:lnTo>
+                    <a:pt x="5228444" y="624540"/>
+                  </a:lnTo>
+                  <a:lnTo>
+                    <a:pt x="5156821" y="615197"/>
+                  </a:lnTo>
+                  <a:lnTo>
+                    <a:pt x="5085199" y="605417"/>
+                  </a:lnTo>
+                  <a:lnTo>
+                    <a:pt x="5013576" y="595179"/>
+                  </a:lnTo>
+                  <a:lnTo>
+                    <a:pt x="4941954" y="584462"/>
+                  </a:lnTo>
+                  <a:lnTo>
+                    <a:pt x="4870331" y="573243"/>
+                  </a:lnTo>
+                  <a:lnTo>
+                    <a:pt x="4798709" y="561499"/>
+                  </a:lnTo>
+                  <a:lnTo>
+                    <a:pt x="4727086" y="549206"/>
+                  </a:lnTo>
+                  <a:lnTo>
+                    <a:pt x="4655464" y="536337"/>
+                  </a:lnTo>
+                  <a:lnTo>
+                    <a:pt x="4583841" y="522867"/>
+                  </a:lnTo>
+                  <a:lnTo>
+                    <a:pt x="4512219" y="508765"/>
+                  </a:lnTo>
+                  <a:lnTo>
+                    <a:pt x="4440596" y="494004"/>
+                  </a:lnTo>
+                  <a:lnTo>
+                    <a:pt x="4368974" y="478552"/>
+                  </a:lnTo>
+                  <a:lnTo>
+                    <a:pt x="4297351" y="462376"/>
+                  </a:lnTo>
+                  <a:lnTo>
+                    <a:pt x="4225729" y="445444"/>
+                  </a:lnTo>
+                  <a:lnTo>
+                    <a:pt x="4154106" y="427719"/>
+                  </a:lnTo>
+                  <a:lnTo>
+                    <a:pt x="4082483" y="409165"/>
+                  </a:lnTo>
+                  <a:lnTo>
+                    <a:pt x="4010861" y="389742"/>
+                  </a:lnTo>
+                  <a:lnTo>
+                    <a:pt x="3939238" y="369410"/>
+                  </a:lnTo>
+                  <a:lnTo>
+                    <a:pt x="3867616" y="348127"/>
+                  </a:lnTo>
+                  <a:lnTo>
+                    <a:pt x="3795993" y="325847"/>
+                  </a:lnTo>
+                  <a:lnTo>
+                    <a:pt x="3724371" y="302525"/>
+                  </a:lnTo>
+                  <a:lnTo>
+                    <a:pt x="3652748" y="278112"/>
+                  </a:lnTo>
+                  <a:lnTo>
+                    <a:pt x="3581126" y="252555"/>
+                  </a:lnTo>
+                  <a:lnTo>
+                    <a:pt x="3509503" y="225803"/>
+                  </a:lnTo>
+                  <a:lnTo>
+                    <a:pt x="3437881" y="197799"/>
+                  </a:lnTo>
+                  <a:lnTo>
+                    <a:pt x="3366258" y="168484"/>
+                  </a:lnTo>
+                  <a:lnTo>
+                    <a:pt x="3294636" y="137797"/>
+                  </a:lnTo>
+                  <a:lnTo>
+                    <a:pt x="3223013" y="105674"/>
+                  </a:lnTo>
+                  <a:lnTo>
+                    <a:pt x="3151391" y="72047"/>
+                  </a:lnTo>
+                  <a:lnTo>
+                    <a:pt x="3079768" y="36847"/>
                   </a:lnTo>
                   <a:lnTo>
                     <a:pt x="3008146" y="0"/>
                   </a:lnTo>
                   <a:lnTo>
-                    <a:pt x="2936523" y="15209"/>
-                  </a:lnTo>
-                  <a:lnTo>
-                    <a:pt x="2864901" y="43689"/>
-                  </a:lnTo>
-                  <a:lnTo>
-                    <a:pt x="2793278" y="71164"/>
-                  </a:lnTo>
-                  <a:lnTo>
-                    <a:pt x="2721655" y="97668"/>
-                  </a:lnTo>
-                  <a:lnTo>
-                    <a:pt x="2650033" y="123236"/>
-                  </a:lnTo>
-                  <a:lnTo>
-                    <a:pt x="2578410" y="147901"/>
-                  </a:lnTo>
-                  <a:lnTo>
-                    <a:pt x="2506788" y="171694"/>
-                  </a:lnTo>
-                  <a:lnTo>
-                    <a:pt x="2435165" y="194647"/>
-                  </a:lnTo>
-                  <a:lnTo>
-                    <a:pt x="2363543" y="216790"/>
-                  </a:lnTo>
-                  <a:lnTo>
-                    <a:pt x="2291920" y="238150"/>
-                  </a:lnTo>
-                  <a:lnTo>
-                    <a:pt x="2220298" y="258756"/>
-                  </a:lnTo>
-                  <a:lnTo>
-                    <a:pt x="2148675" y="278634"/>
-                  </a:lnTo>
-                  <a:lnTo>
-                    <a:pt x="2077053" y="297810"/>
-                  </a:lnTo>
-                  <a:lnTo>
-                    <a:pt x="2005430" y="316309"/>
-                  </a:lnTo>
-                  <a:lnTo>
-                    <a:pt x="1933808" y="334154"/>
-                  </a:lnTo>
-                  <a:lnTo>
-                    <a:pt x="1862185" y="351369"/>
-                  </a:lnTo>
-                  <a:lnTo>
-                    <a:pt x="1790563" y="367976"/>
-                  </a:lnTo>
-                  <a:lnTo>
-                    <a:pt x="1718940" y="383996"/>
-                  </a:lnTo>
-                  <a:lnTo>
-                    <a:pt x="1647318" y="399451"/>
-                  </a:lnTo>
-                  <a:lnTo>
-                    <a:pt x="1575695" y="414360"/>
-                  </a:lnTo>
-                  <a:lnTo>
-                    <a:pt x="1504073" y="428742"/>
-                  </a:lnTo>
-                  <a:lnTo>
-                    <a:pt x="1432450" y="442616"/>
-                  </a:lnTo>
-                  <a:lnTo>
-                    <a:pt x="1360827" y="456000"/>
-                  </a:lnTo>
-                  <a:lnTo>
-                    <a:pt x="1289205" y="468911"/>
-                  </a:lnTo>
-                  <a:lnTo>
-                    <a:pt x="1217582" y="481366"/>
-                  </a:lnTo>
-                  <a:lnTo>
-                    <a:pt x="1145960" y="493382"/>
-                  </a:lnTo>
-                  <a:lnTo>
-                    <a:pt x="1074337" y="504973"/>
-                  </a:lnTo>
-                  <a:lnTo>
-                    <a:pt x="1002715" y="516154"/>
-                  </a:lnTo>
-                  <a:lnTo>
-                    <a:pt x="931092" y="526941"/>
-                  </a:lnTo>
-                  <a:lnTo>
-                    <a:pt x="859470" y="537346"/>
-                  </a:lnTo>
-                  <a:lnTo>
-                    <a:pt x="787847" y="547384"/>
-                  </a:lnTo>
-                  <a:lnTo>
-                    <a:pt x="716225" y="557068"/>
-                  </a:lnTo>
-                  <a:lnTo>
-                    <a:pt x="644602" y="566409"/>
-                  </a:lnTo>
-                  <a:lnTo>
-                    <a:pt x="572980" y="575421"/>
-                  </a:lnTo>
-                  <a:lnTo>
-                    <a:pt x="501357" y="584114"/>
-                  </a:lnTo>
-                  <a:lnTo>
-                    <a:pt x="429735" y="592500"/>
-                  </a:lnTo>
-                  <a:lnTo>
-                    <a:pt x="358112" y="600590"/>
-                  </a:lnTo>
-                  <a:lnTo>
-                    <a:pt x="286490" y="608395"/>
-                  </a:lnTo>
-                  <a:lnTo>
-                    <a:pt x="214867" y="615923"/>
-                  </a:lnTo>
-                  <a:lnTo>
-                    <a:pt x="143245" y="623186"/>
-                  </a:lnTo>
-                  <a:lnTo>
-                    <a:pt x="71622" y="630192"/>
-                  </a:lnTo>
-                  <a:lnTo>
-                    <a:pt x="0" y="636951"/>
+                    <a:pt x="2936523" y="20011"/>
+                  </a:lnTo>
+                  <a:lnTo>
+                    <a:pt x="2864901" y="48464"/>
+                  </a:lnTo>
+                  <a:lnTo>
+                    <a:pt x="2793278" y="75911"/>
+                  </a:lnTo>
+                  <a:lnTo>
+                    <a:pt x="2721655" y="102386"/>
+                  </a:lnTo>
+                  <a:lnTo>
+                    <a:pt x="2650033" y="127925"/>
+                  </a:lnTo>
+                  <a:lnTo>
+                    <a:pt x="2578410" y="152560"/>
+                  </a:lnTo>
+                  <a:lnTo>
+                    <a:pt x="2506788" y="176323"/>
+                  </a:lnTo>
+                  <a:lnTo>
+                    <a:pt x="2435165" y="199245"/>
+                  </a:lnTo>
+                  <a:lnTo>
+                    <a:pt x="2363543" y="221357"/>
+                  </a:lnTo>
+                  <a:lnTo>
+                    <a:pt x="2291920" y="242686"/>
+                  </a:lnTo>
+                  <a:lnTo>
+                    <a:pt x="2220298" y="263260"/>
+                  </a:lnTo>
+                  <a:lnTo>
+                    <a:pt x="2148675" y="283107"/>
+                  </a:lnTo>
+                  <a:lnTo>
+                    <a:pt x="2077053" y="302251"/>
+                  </a:lnTo>
+                  <a:lnTo>
+                    <a:pt x="2005430" y="320718"/>
+                  </a:lnTo>
+                  <a:lnTo>
+                    <a:pt x="1933808" y="338531"/>
+                  </a:lnTo>
+                  <a:lnTo>
+                    <a:pt x="1862185" y="355714"/>
+                  </a:lnTo>
+                  <a:lnTo>
+                    <a:pt x="1790563" y="372289"/>
+                  </a:lnTo>
+                  <a:lnTo>
+                    <a:pt x="1718940" y="388278"/>
+                  </a:lnTo>
+                  <a:lnTo>
+                    <a:pt x="1647318" y="403701"/>
+                  </a:lnTo>
+                  <a:lnTo>
+                    <a:pt x="1575695" y="418578"/>
+                  </a:lnTo>
+                  <a:lnTo>
+                    <a:pt x="1504073" y="432929"/>
+                  </a:lnTo>
+                  <a:lnTo>
+                    <a:pt x="1432450" y="446772"/>
+                  </a:lnTo>
+                  <a:lnTo>
+                    <a:pt x="1360827" y="460126"/>
+                  </a:lnTo>
+                  <a:lnTo>
+                    <a:pt x="1289205" y="473007"/>
+                  </a:lnTo>
+                  <a:lnTo>
+                    <a:pt x="1217582" y="485432"/>
+                  </a:lnTo>
+                  <a:lnTo>
+                    <a:pt x="1145960" y="497417"/>
+                  </a:lnTo>
+                  <a:lnTo>
+                    <a:pt x="1074337" y="508978"/>
+                  </a:lnTo>
+                  <a:lnTo>
+                    <a:pt x="1002715" y="520131"/>
+                  </a:lnTo>
+                  <a:lnTo>
+                    <a:pt x="931092" y="530888"/>
+                  </a:lnTo>
+                  <a:lnTo>
+                    <a:pt x="859470" y="541265"/>
+                  </a:lnTo>
+                  <a:lnTo>
+                    <a:pt x="787847" y="551275"/>
+                  </a:lnTo>
+                  <a:lnTo>
+                    <a:pt x="716225" y="560931"/>
+                  </a:lnTo>
+                  <a:lnTo>
+                    <a:pt x="644602" y="570245"/>
+                  </a:lnTo>
+                  <a:lnTo>
+                    <a:pt x="572980" y="579230"/>
+                  </a:lnTo>
+                  <a:lnTo>
+                    <a:pt x="501357" y="587896"/>
+                  </a:lnTo>
+                  <a:lnTo>
+                    <a:pt x="429735" y="596256"/>
+                  </a:lnTo>
+                  <a:lnTo>
+                    <a:pt x="358112" y="604320"/>
+                  </a:lnTo>
+                  <a:lnTo>
+                    <a:pt x="286490" y="612099"/>
+                  </a:lnTo>
+                  <a:lnTo>
+                    <a:pt x="214867" y="619603"/>
+                  </a:lnTo>
+                  <a:lnTo>
+                    <a:pt x="143245" y="626841"/>
+                  </a:lnTo>
+                  <a:lnTo>
+                    <a:pt x="71622" y="633823"/>
+                  </a:lnTo>
+                  <a:lnTo>
+                    <a:pt x="0" y="640558"/>
                   </a:lnTo>
                 </a:path>
               </a:pathLst>
@@ -4130,312 +4124,312 @@
           </p:nvSpPr>
           <p:spPr>
             <a:xfrm>
-              <a:off x="1172049" y="4556856"/>
-              <a:ext cx="7090630" cy="358620"/>
+              <a:off x="1172049" y="4540748"/>
+              <a:ext cx="7090630" cy="388079"/>
             </a:xfrm>
             <a:custGeom>
               <a:avLst/>
               <a:pathLst>
-                <a:path w="7090630" h="358620">
+                <a:path w="7090630" h="388079">
                   <a:moveTo>
                     <a:pt x="0" y="0"/>
                   </a:moveTo>
                   <a:lnTo>
-                    <a:pt x="71622" y="4475"/>
-                  </a:lnTo>
-                  <a:lnTo>
-                    <a:pt x="143245" y="8931"/>
-                  </a:lnTo>
-                  <a:lnTo>
-                    <a:pt x="214867" y="13367"/>
-                  </a:lnTo>
-                  <a:lnTo>
-                    <a:pt x="286490" y="17783"/>
-                  </a:lnTo>
-                  <a:lnTo>
-                    <a:pt x="358112" y="22179"/>
-                  </a:lnTo>
-                  <a:lnTo>
-                    <a:pt x="429735" y="26555"/>
-                  </a:lnTo>
-                  <a:lnTo>
-                    <a:pt x="501357" y="30912"/>
-                  </a:lnTo>
-                  <a:lnTo>
-                    <a:pt x="572980" y="35249"/>
-                  </a:lnTo>
-                  <a:lnTo>
-                    <a:pt x="644602" y="39567"/>
-                  </a:lnTo>
-                  <a:lnTo>
-                    <a:pt x="716225" y="43866"/>
-                  </a:lnTo>
-                  <a:lnTo>
-                    <a:pt x="787847" y="48146"/>
-                  </a:lnTo>
-                  <a:lnTo>
-                    <a:pt x="859470" y="52406"/>
-                  </a:lnTo>
-                  <a:lnTo>
-                    <a:pt x="931092" y="56647"/>
-                  </a:lnTo>
-                  <a:lnTo>
-                    <a:pt x="1002715" y="60869"/>
-                  </a:lnTo>
-                  <a:lnTo>
-                    <a:pt x="1074337" y="65073"/>
-                  </a:lnTo>
-                  <a:lnTo>
-                    <a:pt x="1145960" y="69257"/>
-                  </a:lnTo>
-                  <a:lnTo>
-                    <a:pt x="1217582" y="73423"/>
-                  </a:lnTo>
-                  <a:lnTo>
-                    <a:pt x="1289205" y="77570"/>
-                  </a:lnTo>
-                  <a:lnTo>
-                    <a:pt x="1360827" y="81699"/>
-                  </a:lnTo>
-                  <a:lnTo>
-                    <a:pt x="1432450" y="85809"/>
-                  </a:lnTo>
-                  <a:lnTo>
-                    <a:pt x="1504073" y="89901"/>
-                  </a:lnTo>
-                  <a:lnTo>
-                    <a:pt x="1575695" y="93975"/>
-                  </a:lnTo>
-                  <a:lnTo>
-                    <a:pt x="1647318" y="98030"/>
-                  </a:lnTo>
-                  <a:lnTo>
-                    <a:pt x="1718940" y="102067"/>
-                  </a:lnTo>
-                  <a:lnTo>
-                    <a:pt x="1790563" y="106086"/>
-                  </a:lnTo>
-                  <a:lnTo>
-                    <a:pt x="1862185" y="110087"/>
-                  </a:lnTo>
-                  <a:lnTo>
-                    <a:pt x="1933808" y="114070"/>
-                  </a:lnTo>
-                  <a:lnTo>
-                    <a:pt x="2005430" y="118036"/>
-                  </a:lnTo>
-                  <a:lnTo>
-                    <a:pt x="2077053" y="121983"/>
-                  </a:lnTo>
-                  <a:lnTo>
-                    <a:pt x="2148675" y="125913"/>
-                  </a:lnTo>
-                  <a:lnTo>
-                    <a:pt x="2220298" y="129826"/>
-                  </a:lnTo>
-                  <a:lnTo>
-                    <a:pt x="2291920" y="133720"/>
-                  </a:lnTo>
-                  <a:lnTo>
-                    <a:pt x="2363543" y="137598"/>
-                  </a:lnTo>
-                  <a:lnTo>
-                    <a:pt x="2435165" y="141458"/>
-                  </a:lnTo>
-                  <a:lnTo>
-                    <a:pt x="2506788" y="145301"/>
-                  </a:lnTo>
-                  <a:lnTo>
-                    <a:pt x="2578410" y="149126"/>
-                  </a:lnTo>
-                  <a:lnTo>
-                    <a:pt x="2650033" y="152935"/>
-                  </a:lnTo>
-                  <a:lnTo>
-                    <a:pt x="2721655" y="156726"/>
-                  </a:lnTo>
-                  <a:lnTo>
-                    <a:pt x="2793278" y="160501"/>
-                  </a:lnTo>
-                  <a:lnTo>
-                    <a:pt x="2864901" y="164259"/>
-                  </a:lnTo>
-                  <a:lnTo>
-                    <a:pt x="2936523" y="167999"/>
-                  </a:lnTo>
-                  <a:lnTo>
-                    <a:pt x="3008146" y="171724"/>
-                  </a:lnTo>
-                  <a:lnTo>
-                    <a:pt x="3079768" y="175431"/>
-                  </a:lnTo>
-                  <a:lnTo>
-                    <a:pt x="3151391" y="179122"/>
-                  </a:lnTo>
-                  <a:lnTo>
-                    <a:pt x="3223013" y="182796"/>
-                  </a:lnTo>
-                  <a:lnTo>
-                    <a:pt x="3294636" y="186454"/>
-                  </a:lnTo>
-                  <a:lnTo>
-                    <a:pt x="3366258" y="190096"/>
-                  </a:lnTo>
-                  <a:lnTo>
-                    <a:pt x="3437881" y="193721"/>
-                  </a:lnTo>
-                  <a:lnTo>
-                    <a:pt x="3509503" y="197330"/>
-                  </a:lnTo>
-                  <a:lnTo>
-                    <a:pt x="3581126" y="200923"/>
-                  </a:lnTo>
-                  <a:lnTo>
-                    <a:pt x="3652748" y="204499"/>
-                  </a:lnTo>
-                  <a:lnTo>
-                    <a:pt x="3724371" y="208060"/>
-                  </a:lnTo>
-                  <a:lnTo>
-                    <a:pt x="3795993" y="211605"/>
-                  </a:lnTo>
-                  <a:lnTo>
-                    <a:pt x="3867616" y="215134"/>
-                  </a:lnTo>
-                  <a:lnTo>
-                    <a:pt x="3939238" y="218647"/>
-                  </a:lnTo>
-                  <a:lnTo>
-                    <a:pt x="4010861" y="222145"/>
-                  </a:lnTo>
-                  <a:lnTo>
-                    <a:pt x="4082483" y="225627"/>
-                  </a:lnTo>
-                  <a:lnTo>
-                    <a:pt x="4154106" y="229093"/>
-                  </a:lnTo>
-                  <a:lnTo>
-                    <a:pt x="4225729" y="232544"/>
-                  </a:lnTo>
-                  <a:lnTo>
-                    <a:pt x="4297351" y="235979"/>
-                  </a:lnTo>
-                  <a:lnTo>
-                    <a:pt x="4368974" y="239399"/>
-                  </a:lnTo>
-                  <a:lnTo>
-                    <a:pt x="4440596" y="242804"/>
-                  </a:lnTo>
-                  <a:lnTo>
-                    <a:pt x="4512219" y="246193"/>
-                  </a:lnTo>
-                  <a:lnTo>
-                    <a:pt x="4583841" y="249567"/>
-                  </a:lnTo>
-                  <a:lnTo>
-                    <a:pt x="4655464" y="252926"/>
-                  </a:lnTo>
-                  <a:lnTo>
-                    <a:pt x="4727086" y="256270"/>
-                  </a:lnTo>
-                  <a:lnTo>
-                    <a:pt x="4798709" y="259600"/>
-                  </a:lnTo>
-                  <a:lnTo>
-                    <a:pt x="4870331" y="262914"/>
-                  </a:lnTo>
-                  <a:lnTo>
-                    <a:pt x="4941954" y="266213"/>
-                  </a:lnTo>
-                  <a:lnTo>
-                    <a:pt x="5013576" y="269498"/>
-                  </a:lnTo>
-                  <a:lnTo>
-                    <a:pt x="5085199" y="272768"/>
-                  </a:lnTo>
-                  <a:lnTo>
-                    <a:pt x="5156821" y="276023"/>
-                  </a:lnTo>
-                  <a:lnTo>
-                    <a:pt x="5228444" y="279264"/>
-                  </a:lnTo>
-                  <a:lnTo>
-                    <a:pt x="5300066" y="282490"/>
-                  </a:lnTo>
-                  <a:lnTo>
-                    <a:pt x="5371689" y="285702"/>
-                  </a:lnTo>
-                  <a:lnTo>
-                    <a:pt x="5443311" y="288900"/>
-                  </a:lnTo>
-                  <a:lnTo>
-                    <a:pt x="5514934" y="292083"/>
-                  </a:lnTo>
-                  <a:lnTo>
-                    <a:pt x="5586557" y="295252"/>
-                  </a:lnTo>
-                  <a:lnTo>
-                    <a:pt x="5658179" y="298407"/>
-                  </a:lnTo>
-                  <a:lnTo>
-                    <a:pt x="5729802" y="301547"/>
-                  </a:lnTo>
-                  <a:lnTo>
-                    <a:pt x="5801424" y="304674"/>
-                  </a:lnTo>
-                  <a:lnTo>
-                    <a:pt x="5873047" y="307787"/>
-                  </a:lnTo>
-                  <a:lnTo>
-                    <a:pt x="5944669" y="310885"/>
-                  </a:lnTo>
-                  <a:lnTo>
-                    <a:pt x="6016292" y="313970"/>
-                  </a:lnTo>
-                  <a:lnTo>
-                    <a:pt x="6087914" y="317041"/>
-                  </a:lnTo>
-                  <a:lnTo>
-                    <a:pt x="6159537" y="320098"/>
-                  </a:lnTo>
-                  <a:lnTo>
-                    <a:pt x="6231159" y="323142"/>
-                  </a:lnTo>
-                  <a:lnTo>
-                    <a:pt x="6302782" y="326172"/>
-                  </a:lnTo>
-                  <a:lnTo>
-                    <a:pt x="6374404" y="329188"/>
-                  </a:lnTo>
-                  <a:lnTo>
-                    <a:pt x="6446027" y="332191"/>
-                  </a:lnTo>
-                  <a:lnTo>
-                    <a:pt x="6517649" y="335181"/>
-                  </a:lnTo>
-                  <a:lnTo>
-                    <a:pt x="6589272" y="338157"/>
-                  </a:lnTo>
-                  <a:lnTo>
-                    <a:pt x="6660894" y="341120"/>
-                  </a:lnTo>
-                  <a:lnTo>
-                    <a:pt x="6732517" y="344069"/>
-                  </a:lnTo>
-                  <a:lnTo>
-                    <a:pt x="6804139" y="347006"/>
-                  </a:lnTo>
-                  <a:lnTo>
-                    <a:pt x="6875762" y="349929"/>
-                  </a:lnTo>
-                  <a:lnTo>
-                    <a:pt x="6947385" y="352839"/>
-                  </a:lnTo>
-                  <a:lnTo>
-                    <a:pt x="7019007" y="355736"/>
-                  </a:lnTo>
-                  <a:lnTo>
-                    <a:pt x="7090630" y="358620"/>
+                    <a:pt x="71622" y="4925"/>
+                  </a:lnTo>
+                  <a:lnTo>
+                    <a:pt x="143245" y="9827"/>
+                  </a:lnTo>
+                  <a:lnTo>
+                    <a:pt x="214867" y="14706"/>
+                  </a:lnTo>
+                  <a:lnTo>
+                    <a:pt x="286490" y="19560"/>
+                  </a:lnTo>
+                  <a:lnTo>
+                    <a:pt x="358112" y="24391"/>
+                  </a:lnTo>
+                  <a:lnTo>
+                    <a:pt x="429735" y="29199"/>
+                  </a:lnTo>
+                  <a:lnTo>
+                    <a:pt x="501357" y="33983"/>
+                  </a:lnTo>
+                  <a:lnTo>
+                    <a:pt x="572980" y="38745"/>
+                  </a:lnTo>
+                  <a:lnTo>
+                    <a:pt x="644602" y="43483"/>
+                  </a:lnTo>
+                  <a:lnTo>
+                    <a:pt x="716225" y="48198"/>
+                  </a:lnTo>
+                  <a:lnTo>
+                    <a:pt x="787847" y="52890"/>
+                  </a:lnTo>
+                  <a:lnTo>
+                    <a:pt x="859470" y="57560"/>
+                  </a:lnTo>
+                  <a:lnTo>
+                    <a:pt x="931092" y="62207"/>
+                  </a:lnTo>
+                  <a:lnTo>
+                    <a:pt x="1002715" y="66831"/>
+                  </a:lnTo>
+                  <a:lnTo>
+                    <a:pt x="1074337" y="71433"/>
+                  </a:lnTo>
+                  <a:lnTo>
+                    <a:pt x="1145960" y="76013"/>
+                  </a:lnTo>
+                  <a:lnTo>
+                    <a:pt x="1217582" y="80570"/>
+                  </a:lnTo>
+                  <a:lnTo>
+                    <a:pt x="1289205" y="85106"/>
+                  </a:lnTo>
+                  <a:lnTo>
+                    <a:pt x="1360827" y="89619"/>
+                  </a:lnTo>
+                  <a:lnTo>
+                    <a:pt x="1432450" y="94111"/>
+                  </a:lnTo>
+                  <a:lnTo>
+                    <a:pt x="1504073" y="98580"/>
+                  </a:lnTo>
+                  <a:lnTo>
+                    <a:pt x="1575695" y="103029"/>
+                  </a:lnTo>
+                  <a:lnTo>
+                    <a:pt x="1647318" y="107455"/>
+                  </a:lnTo>
+                  <a:lnTo>
+                    <a:pt x="1718940" y="111860"/>
+                  </a:lnTo>
+                  <a:lnTo>
+                    <a:pt x="1790563" y="116244"/>
+                  </a:lnTo>
+                  <a:lnTo>
+                    <a:pt x="1862185" y="120607"/>
+                  </a:lnTo>
+                  <a:lnTo>
+                    <a:pt x="1933808" y="124948"/>
+                  </a:lnTo>
+                  <a:lnTo>
+                    <a:pt x="2005430" y="129269"/>
+                  </a:lnTo>
+                  <a:lnTo>
+                    <a:pt x="2077053" y="133568"/>
+                  </a:lnTo>
+                  <a:lnTo>
+                    <a:pt x="2148675" y="137847"/>
+                  </a:lnTo>
+                  <a:lnTo>
+                    <a:pt x="2220298" y="142104"/>
+                  </a:lnTo>
+                  <a:lnTo>
+                    <a:pt x="2291920" y="146342"/>
+                  </a:lnTo>
+                  <a:lnTo>
+                    <a:pt x="2363543" y="150558"/>
+                  </a:lnTo>
+                  <a:lnTo>
+                    <a:pt x="2435165" y="154755"/>
+                  </a:lnTo>
+                  <a:lnTo>
+                    <a:pt x="2506788" y="158931"/>
+                  </a:lnTo>
+                  <a:lnTo>
+                    <a:pt x="2578410" y="163086"/>
+                  </a:lnTo>
+                  <a:lnTo>
+                    <a:pt x="2650033" y="167222"/>
+                  </a:lnTo>
+                  <a:lnTo>
+                    <a:pt x="2721655" y="171337"/>
+                  </a:lnTo>
+                  <a:lnTo>
+                    <a:pt x="2793278" y="175433"/>
+                  </a:lnTo>
+                  <a:lnTo>
+                    <a:pt x="2864901" y="179509"/>
+                  </a:lnTo>
+                  <a:lnTo>
+                    <a:pt x="2936523" y="183565"/>
+                  </a:lnTo>
+                  <a:lnTo>
+                    <a:pt x="3008146" y="187601"/>
+                  </a:lnTo>
+                  <a:lnTo>
+                    <a:pt x="3079768" y="191618"/>
+                  </a:lnTo>
+                  <a:lnTo>
+                    <a:pt x="3151391" y="195615"/>
+                  </a:lnTo>
+                  <a:lnTo>
+                    <a:pt x="3223013" y="199593"/>
+                  </a:lnTo>
+                  <a:lnTo>
+                    <a:pt x="3294636" y="203552"/>
+                  </a:lnTo>
+                  <a:lnTo>
+                    <a:pt x="3366258" y="207491"/>
+                  </a:lnTo>
+                  <a:lnTo>
+                    <a:pt x="3437881" y="211412"/>
+                  </a:lnTo>
+                  <a:lnTo>
+                    <a:pt x="3509503" y="215313"/>
+                  </a:lnTo>
+                  <a:lnTo>
+                    <a:pt x="3581126" y="219195"/>
+                  </a:lnTo>
+                  <a:lnTo>
+                    <a:pt x="3652748" y="223059"/>
+                  </a:lnTo>
+                  <a:lnTo>
+                    <a:pt x="3724371" y="226904"/>
+                  </a:lnTo>
+                  <a:lnTo>
+                    <a:pt x="3795993" y="230730"/>
+                  </a:lnTo>
+                  <a:lnTo>
+                    <a:pt x="3867616" y="234538"/>
+                  </a:lnTo>
+                  <a:lnTo>
+                    <a:pt x="3939238" y="238327"/>
+                  </a:lnTo>
+                  <a:lnTo>
+                    <a:pt x="4010861" y="242098"/>
+                  </a:lnTo>
+                  <a:lnTo>
+                    <a:pt x="4082483" y="245851"/>
+                  </a:lnTo>
+                  <a:lnTo>
+                    <a:pt x="4154106" y="249586"/>
+                  </a:lnTo>
+                  <a:lnTo>
+                    <a:pt x="4225729" y="253302"/>
+                  </a:lnTo>
+                  <a:lnTo>
+                    <a:pt x="4297351" y="257000"/>
+                  </a:lnTo>
+                  <a:lnTo>
+                    <a:pt x="4368974" y="260681"/>
+                  </a:lnTo>
+                  <a:lnTo>
+                    <a:pt x="4440596" y="264343"/>
+                  </a:lnTo>
+                  <a:lnTo>
+                    <a:pt x="4512219" y="267988"/>
+                  </a:lnTo>
+                  <a:lnTo>
+                    <a:pt x="4583841" y="271616"/>
+                  </a:lnTo>
+                  <a:lnTo>
+                    <a:pt x="4655464" y="275225"/>
+                  </a:lnTo>
+                  <a:lnTo>
+                    <a:pt x="4727086" y="278817"/>
+                  </a:lnTo>
+                  <a:lnTo>
+                    <a:pt x="4798709" y="282392"/>
+                  </a:lnTo>
+                  <a:lnTo>
+                    <a:pt x="4870331" y="285949"/>
+                  </a:lnTo>
+                  <a:lnTo>
+                    <a:pt x="4941954" y="289490"/>
+                  </a:lnTo>
+                  <a:lnTo>
+                    <a:pt x="5013576" y="293013"/>
+                  </a:lnTo>
+                  <a:lnTo>
+                    <a:pt x="5085199" y="296519"/>
+                  </a:lnTo>
+                  <a:lnTo>
+                    <a:pt x="5156821" y="300008"/>
+                  </a:lnTo>
+                  <a:lnTo>
+                    <a:pt x="5228444" y="303480"/>
+                  </a:lnTo>
+                  <a:lnTo>
+                    <a:pt x="5300066" y="306935"/>
+                  </a:lnTo>
+                  <a:lnTo>
+                    <a:pt x="5371689" y="310373"/>
+                  </a:lnTo>
+                  <a:lnTo>
+                    <a:pt x="5443311" y="313795"/>
+                  </a:lnTo>
+                  <a:lnTo>
+                    <a:pt x="5514934" y="317200"/>
+                  </a:lnTo>
+                  <a:lnTo>
+                    <a:pt x="5586557" y="320589"/>
+                  </a:lnTo>
+                  <a:lnTo>
+                    <a:pt x="5658179" y="323962"/>
+                  </a:lnTo>
+                  <a:lnTo>
+                    <a:pt x="5729802" y="327318"/>
+                  </a:lnTo>
+                  <a:lnTo>
+                    <a:pt x="5801424" y="330657"/>
+                  </a:lnTo>
+                  <a:lnTo>
+                    <a:pt x="5873047" y="333981"/>
+                  </a:lnTo>
+                  <a:lnTo>
+                    <a:pt x="5944669" y="337288"/>
+                  </a:lnTo>
+                  <a:lnTo>
+                    <a:pt x="6016292" y="340580"/>
+                  </a:lnTo>
+                  <a:lnTo>
+                    <a:pt x="6087914" y="343855"/>
+                  </a:lnTo>
+                  <a:lnTo>
+                    <a:pt x="6159537" y="347115"/>
+                  </a:lnTo>
+                  <a:lnTo>
+                    <a:pt x="6231159" y="350358"/>
+                  </a:lnTo>
+                  <a:lnTo>
+                    <a:pt x="6302782" y="353586"/>
+                  </a:lnTo>
+                  <a:lnTo>
+                    <a:pt x="6374404" y="356799"/>
+                  </a:lnTo>
+                  <a:lnTo>
+                    <a:pt x="6446027" y="359996"/>
+                  </a:lnTo>
+                  <a:lnTo>
+                    <a:pt x="6517649" y="363177"/>
+                  </a:lnTo>
+                  <a:lnTo>
+                    <a:pt x="6589272" y="366343"/>
+                  </a:lnTo>
+                  <a:lnTo>
+                    <a:pt x="6660894" y="369494"/>
+                  </a:lnTo>
+                  <a:lnTo>
+                    <a:pt x="6732517" y="372629"/>
+                  </a:lnTo>
+                  <a:lnTo>
+                    <a:pt x="6804139" y="375749"/>
+                  </a:lnTo>
+                  <a:lnTo>
+                    <a:pt x="6875762" y="378854"/>
+                  </a:lnTo>
+                  <a:lnTo>
+                    <a:pt x="6947385" y="381944"/>
+                  </a:lnTo>
+                  <a:lnTo>
+                    <a:pt x="7019007" y="385019"/>
+                  </a:lnTo>
+                  <a:lnTo>
+                    <a:pt x="7090630" y="388079"/>
                   </a:lnTo>
                 </a:path>
               </a:pathLst>
@@ -4507,7 +4501,7 @@
           </p:nvSpPr>
           <p:spPr>
             <a:xfrm>
-              <a:off x="4164901" y="2073503"/>
+              <a:off x="4170171" y="2073503"/>
               <a:ext cx="0" cy="3649639"/>
             </a:xfrm>
             <a:custGeom>
@@ -4780,7 +4774,7 @@
           </p:nvSpPr>
           <p:spPr>
             <a:xfrm>
-              <a:off x="2284877" y="5785772"/>
+              <a:off x="2285456" y="5785772"/>
               <a:ext cx="161574" cy="80101"/>
             </a:xfrm>
             <a:prstGeom prst="rect">
@@ -4826,7 +4820,7 @@
           </p:nvSpPr>
           <p:spPr>
             <a:xfrm>
-              <a:off x="4138944" y="5785772"/>
+              <a:off x="4139043" y="5785772"/>
               <a:ext cx="62179" cy="80101"/>
             </a:xfrm>
             <a:prstGeom prst="rect">
@@ -4872,7 +4866,7 @@
           </p:nvSpPr>
           <p:spPr>
             <a:xfrm>
-              <a:off x="5912223" y="5785772"/>
+              <a:off x="5911843" y="5785772"/>
               <a:ext cx="124358" cy="80101"/>
             </a:xfrm>
             <a:prstGeom prst="rect">
@@ -4918,7 +4912,7 @@
           </p:nvSpPr>
           <p:spPr>
             <a:xfrm>
-              <a:off x="7716592" y="5785772"/>
+              <a:off x="7715733" y="5785772"/>
               <a:ext cx="124358" cy="80101"/>
             </a:xfrm>
             <a:prstGeom prst="rect">
@@ -5089,7 +5083,7 @@
                   <a:latin typeface="Helvetica"/>
                   <a:cs typeface="Helvetica"/>
                 </a:rPr>
-                <a:t>subHR per 10 % decline: 1.06 (0.64-1.76), p_Bonf = 1.000 (n = 6)  |  per IQR decline (Δ = 27.4 %): 1.17 (0.29-4.73)  |  IQR: [-12.6, 14.8] %</a:t>
+                <a:t>subHR per 10 % decline: 1.06 (0.64-1.78), p_Bonf = 1.000 (n = 6)  |  per IQR decline (Δ = 27.2 %): 1.18 (0.29-4.80)  |  IQR: [-12.3, 14.9] %</a:t>
               </a:r>
             </a:p>
           </p:txBody>
